--- a/Iot sensor anomoly detetction.pptx
+++ b/Iot sensor anomoly detetction.pptx
@@ -5,7 +5,7 @@
     <p:sldMasterId id="2147483798" r:id="rId1"/>
   </p:sldMasterIdLst>
   <p:notesMasterIdLst>
-    <p:notesMasterId r:id="rId17"/>
+    <p:notesMasterId r:id="rId18"/>
   </p:notesMasterIdLst>
   <p:sldIdLst>
     <p:sldId id="264" r:id="rId2"/>
@@ -16,13 +16,14 @@
     <p:sldId id="263" r:id="rId7"/>
     <p:sldId id="265" r:id="rId8"/>
     <p:sldId id="268" r:id="rId9"/>
-    <p:sldId id="269" r:id="rId10"/>
-    <p:sldId id="270" r:id="rId11"/>
-    <p:sldId id="271" r:id="rId12"/>
-    <p:sldId id="272" r:id="rId13"/>
-    <p:sldId id="273" r:id="rId14"/>
-    <p:sldId id="274" r:id="rId15"/>
-    <p:sldId id="275" r:id="rId16"/>
+    <p:sldId id="271" r:id="rId10"/>
+    <p:sldId id="272" r:id="rId11"/>
+    <p:sldId id="276" r:id="rId12"/>
+    <p:sldId id="269" r:id="rId13"/>
+    <p:sldId id="270" r:id="rId14"/>
+    <p:sldId id="273" r:id="rId15"/>
+    <p:sldId id="274" r:id="rId16"/>
+    <p:sldId id="275" r:id="rId17"/>
   </p:sldIdLst>
   <p:sldSz cx="12192000" cy="6858000"/>
   <p:notesSz cx="6858000" cy="9144000"/>
@@ -132,7 +133,7 @@
 <file path=ppt/revisionInfo.xml><?xml version="1.0" encoding="utf-8"?>
 <p1510:revInfo xmlns:a="http://schemas.openxmlformats.org/drawingml/2006/main" xmlns:r="http://schemas.openxmlformats.org/officeDocument/2006/relationships" xmlns:p1510="http://schemas.microsoft.com/office/powerpoint/2015/10/main">
   <p1510:revLst>
-    <p1510:client id="{62F1994D-C734-4C06-B0E1-0AECC1958F22}" v="1" dt="2026-03-18T04:31:41.534"/>
+    <p1510:client id="{62F1994D-C734-4C06-B0E1-0AECC1958F22}" v="4" dt="2026-03-19T09:23:44.038"/>
   </p1510:revLst>
 </p1510:revInfo>
 </file>
@@ -141,8 +142,8 @@
 <pc:chgInfo xmlns:a="http://schemas.openxmlformats.org/drawingml/2006/main" xmlns:r="http://schemas.openxmlformats.org/officeDocument/2006/relationships" xmlns:ac="http://schemas.microsoft.com/office/drawing/2013/main/command" xmlns:pc="http://schemas.microsoft.com/office/powerpoint/2013/main/command">
   <pc:docChgLst>
     <pc:chgData name="Bellamkonda Satya sai venkateswarlu" userId="a00ae827de090eec" providerId="LiveId" clId="{2E0DFA91-85F5-4C63-AE93-6F1657668455}"/>
-    <pc:docChg chg="custSel delSld modSld">
-      <pc:chgData name="Bellamkonda Satya sai venkateswarlu" userId="a00ae827de090eec" providerId="LiveId" clId="{2E0DFA91-85F5-4C63-AE93-6F1657668455}" dt="2026-03-18T09:20:17.016" v="57" actId="14100"/>
+    <pc:docChg chg="undo custSel addSld delSld modSld sldOrd">
+      <pc:chgData name="Bellamkonda Satya sai venkateswarlu" userId="a00ae827de090eec" providerId="LiveId" clId="{2E0DFA91-85F5-4C63-AE93-6F1657668455}" dt="2026-03-19T10:05:26.921" v="314" actId="14100"/>
       <pc:docMkLst>
         <pc:docMk/>
       </pc:docMkLst>
@@ -169,7 +170,7 @@
         </pc:sldMkLst>
       </pc:sldChg>
       <pc:sldChg chg="modSp mod">
-        <pc:chgData name="Bellamkonda Satya sai venkateswarlu" userId="a00ae827de090eec" providerId="LiveId" clId="{2E0DFA91-85F5-4C63-AE93-6F1657668455}" dt="2026-03-18T05:21:42.840" v="42" actId="1076"/>
+        <pc:chgData name="Bellamkonda Satya sai venkateswarlu" userId="a00ae827de090eec" providerId="LiveId" clId="{2E0DFA91-85F5-4C63-AE93-6F1657668455}" dt="2026-03-19T09:33:16.935" v="289" actId="20577"/>
         <pc:sldMkLst>
           <pc:docMk/>
           <pc:sldMk cId="472364283" sldId="259"/>
@@ -183,13 +184,52 @@
           </ac:spMkLst>
         </pc:spChg>
         <pc:spChg chg="mod">
-          <ac:chgData name="Bellamkonda Satya sai venkateswarlu" userId="a00ae827de090eec" providerId="LiveId" clId="{2E0DFA91-85F5-4C63-AE93-6F1657668455}" dt="2026-03-18T05:21:42.840" v="42" actId="1076"/>
+          <ac:chgData name="Bellamkonda Satya sai venkateswarlu" userId="a00ae827de090eec" providerId="LiveId" clId="{2E0DFA91-85F5-4C63-AE93-6F1657668455}" dt="2026-03-19T09:33:16.935" v="289" actId="20577"/>
           <ac:spMkLst>
             <pc:docMk/>
             <pc:sldMk cId="472364283" sldId="259"/>
             <ac:spMk id="3" creationId="{0443A9F8-5EC9-E387-8113-24613FC42321}"/>
           </ac:spMkLst>
         </pc:spChg>
+      </pc:sldChg>
+      <pc:sldChg chg="addSp delSp modSp mod">
+        <pc:chgData name="Bellamkonda Satya sai venkateswarlu" userId="a00ae827de090eec" providerId="LiveId" clId="{2E0DFA91-85F5-4C63-AE93-6F1657668455}" dt="2026-03-19T09:24:12.231" v="66" actId="931"/>
+        <pc:sldMkLst>
+          <pc:docMk/>
+          <pc:sldMk cId="3328679500" sldId="260"/>
+        </pc:sldMkLst>
+        <pc:spChg chg="add">
+          <ac:chgData name="Bellamkonda Satya sai venkateswarlu" userId="a00ae827de090eec" providerId="LiveId" clId="{2E0DFA91-85F5-4C63-AE93-6F1657668455}" dt="2026-03-19T09:23:35.312" v="63"/>
+          <ac:spMkLst>
+            <pc:docMk/>
+            <pc:sldMk cId="3328679500" sldId="260"/>
+            <ac:spMk id="2" creationId="{AD8FAF8B-54D6-FBF4-ED96-96FEF877B2BB}"/>
+          </ac:spMkLst>
+        </pc:spChg>
+        <pc:spChg chg="add mod">
+          <ac:chgData name="Bellamkonda Satya sai venkateswarlu" userId="a00ae827de090eec" providerId="LiveId" clId="{2E0DFA91-85F5-4C63-AE93-6F1657668455}" dt="2026-03-19T09:23:44.037" v="65" actId="14100"/>
+          <ac:spMkLst>
+            <pc:docMk/>
+            <pc:sldMk cId="3328679500" sldId="260"/>
+            <ac:spMk id="4" creationId="{4BC18D2F-C9E9-6ED7-D9DE-49EC33825D60}"/>
+          </ac:spMkLst>
+        </pc:spChg>
+        <pc:picChg chg="del">
+          <ac:chgData name="Bellamkonda Satya sai venkateswarlu" userId="a00ae827de090eec" providerId="LiveId" clId="{2E0DFA91-85F5-4C63-AE93-6F1657668455}" dt="2026-03-19T09:23:34.359" v="62" actId="478"/>
+          <ac:picMkLst>
+            <pc:docMk/>
+            <pc:sldMk cId="3328679500" sldId="260"/>
+            <ac:picMk id="5" creationId="{6AA5269F-B987-EFC7-73FE-70D6706E39C3}"/>
+          </ac:picMkLst>
+        </pc:picChg>
+        <pc:picChg chg="add mod">
+          <ac:chgData name="Bellamkonda Satya sai venkateswarlu" userId="a00ae827de090eec" providerId="LiveId" clId="{2E0DFA91-85F5-4C63-AE93-6F1657668455}" dt="2026-03-19T09:24:12.231" v="66" actId="931"/>
+          <ac:picMkLst>
+            <pc:docMk/>
+            <pc:sldMk cId="3328679500" sldId="260"/>
+            <ac:picMk id="7" creationId="{A8693412-7CAA-217A-3BD4-396AD21F8028}"/>
+          </ac:picMkLst>
+        </pc:picChg>
       </pc:sldChg>
       <pc:sldChg chg="addSp delSp modSp mod">
         <pc:chgData name="Bellamkonda Satya sai venkateswarlu" userId="a00ae827de090eec" providerId="LiveId" clId="{2E0DFA91-85F5-4C63-AE93-6F1657668455}" dt="2026-03-18T09:20:17.016" v="57" actId="14100"/>
@@ -211,6 +251,155 @@
             <pc:docMk/>
             <pc:sldMk cId="3518060995" sldId="264"/>
             <ac:picMk id="4" creationId="{55397B3D-D28D-B7E7-1E6F-1E748F23BBF6}"/>
+          </ac:picMkLst>
+        </pc:picChg>
+      </pc:sldChg>
+      <pc:sldChg chg="addSp delSp modSp mod ord">
+        <pc:chgData name="Bellamkonda Satya sai venkateswarlu" userId="a00ae827de090eec" providerId="LiveId" clId="{2E0DFA91-85F5-4C63-AE93-6F1657668455}" dt="2026-03-19T10:03:53.124" v="300" actId="14100"/>
+        <pc:sldMkLst>
+          <pc:docMk/>
+          <pc:sldMk cId="1242523886" sldId="271"/>
+        </pc:sldMkLst>
+        <pc:spChg chg="add del mod">
+          <ac:chgData name="Bellamkonda Satya sai venkateswarlu" userId="a00ae827de090eec" providerId="LiveId" clId="{2E0DFA91-85F5-4C63-AE93-6F1657668455}" dt="2026-03-19T10:02:37.136" v="294" actId="931"/>
+          <ac:spMkLst>
+            <pc:docMk/>
+            <pc:sldMk cId="1242523886" sldId="271"/>
+            <ac:spMk id="4" creationId="{7EB37F2A-C9AD-7119-FC21-FEA4E1E4960C}"/>
+          </ac:spMkLst>
+        </pc:spChg>
+        <pc:spChg chg="add del mod">
+          <ac:chgData name="Bellamkonda Satya sai venkateswarlu" userId="a00ae827de090eec" providerId="LiveId" clId="{2E0DFA91-85F5-4C63-AE93-6F1657668455}" dt="2026-03-19T10:03:41.380" v="296" actId="22"/>
+          <ac:spMkLst>
+            <pc:docMk/>
+            <pc:sldMk cId="1242523886" sldId="271"/>
+            <ac:spMk id="8" creationId="{A789EF31-C524-1A33-62B2-BAD1766D6662}"/>
+          </ac:spMkLst>
+        </pc:spChg>
+        <pc:picChg chg="add del mod ord">
+          <ac:chgData name="Bellamkonda Satya sai venkateswarlu" userId="a00ae827de090eec" providerId="LiveId" clId="{2E0DFA91-85F5-4C63-AE93-6F1657668455}" dt="2026-03-19T10:02:40.049" v="295" actId="478"/>
+          <ac:picMkLst>
+            <pc:docMk/>
+            <pc:sldMk cId="1242523886" sldId="271"/>
+            <ac:picMk id="6" creationId="{4CC91E6A-BD5F-A2A8-C569-1C512B8DA654}"/>
+          </ac:picMkLst>
+        </pc:picChg>
+        <pc:picChg chg="add mod ord">
+          <ac:chgData name="Bellamkonda Satya sai venkateswarlu" userId="a00ae827de090eec" providerId="LiveId" clId="{2E0DFA91-85F5-4C63-AE93-6F1657668455}" dt="2026-03-19T10:03:53.124" v="300" actId="14100"/>
+          <ac:picMkLst>
+            <pc:docMk/>
+            <pc:sldMk cId="1242523886" sldId="271"/>
+            <ac:picMk id="10" creationId="{D513CFBA-B1B5-F834-9E12-A7B479B03F42}"/>
+          </ac:picMkLst>
+        </pc:picChg>
+        <pc:picChg chg="del">
+          <ac:chgData name="Bellamkonda Satya sai venkateswarlu" userId="a00ae827de090eec" providerId="LiveId" clId="{2E0DFA91-85F5-4C63-AE93-6F1657668455}" dt="2026-03-19T10:02:13.144" v="290" actId="478"/>
+          <ac:picMkLst>
+            <pc:docMk/>
+            <pc:sldMk cId="1242523886" sldId="271"/>
+            <ac:picMk id="13" creationId="{AAB83ED1-30D2-8534-A3D4-A0099D36A430}"/>
+          </ac:picMkLst>
+        </pc:picChg>
+        <pc:picChg chg="del">
+          <ac:chgData name="Bellamkonda Satya sai venkateswarlu" userId="a00ae827de090eec" providerId="LiveId" clId="{2E0DFA91-85F5-4C63-AE93-6F1657668455}" dt="2026-03-19T10:02:18.046" v="293" actId="478"/>
+          <ac:picMkLst>
+            <pc:docMk/>
+            <pc:sldMk cId="1242523886" sldId="271"/>
+            <ac:picMk id="15" creationId="{C32A20B8-909D-40BE-7677-2B79CCC41BFF}"/>
+          </ac:picMkLst>
+        </pc:picChg>
+        <pc:picChg chg="del">
+          <ac:chgData name="Bellamkonda Satya sai venkateswarlu" userId="a00ae827de090eec" providerId="LiveId" clId="{2E0DFA91-85F5-4C63-AE93-6F1657668455}" dt="2026-03-19T10:02:16.861" v="292" actId="478"/>
+          <ac:picMkLst>
+            <pc:docMk/>
+            <pc:sldMk cId="1242523886" sldId="271"/>
+            <ac:picMk id="17" creationId="{FFFBA5E4-6FF9-7F63-43D3-92A79FED5D5F}"/>
+          </ac:picMkLst>
+        </pc:picChg>
+        <pc:picChg chg="del">
+          <ac:chgData name="Bellamkonda Satya sai venkateswarlu" userId="a00ae827de090eec" providerId="LiveId" clId="{2E0DFA91-85F5-4C63-AE93-6F1657668455}" dt="2026-03-19T10:02:15.338" v="291" actId="478"/>
+          <ac:picMkLst>
+            <pc:docMk/>
+            <pc:sldMk cId="1242523886" sldId="271"/>
+            <ac:picMk id="19" creationId="{A351D55C-D23D-B812-7D26-A3DFBA90C3C5}"/>
+          </ac:picMkLst>
+        </pc:picChg>
+      </pc:sldChg>
+      <pc:sldChg chg="addSp delSp modSp mod ord">
+        <pc:chgData name="Bellamkonda Satya sai venkateswarlu" userId="a00ae827de090eec" providerId="LiveId" clId="{2E0DFA91-85F5-4C63-AE93-6F1657668455}" dt="2026-03-19T10:04:34.304" v="306" actId="14100"/>
+        <pc:sldMkLst>
+          <pc:docMk/>
+          <pc:sldMk cId="1846346669" sldId="272"/>
+        </pc:sldMkLst>
+        <pc:picChg chg="add mod">
+          <ac:chgData name="Bellamkonda Satya sai venkateswarlu" userId="a00ae827de090eec" providerId="LiveId" clId="{2E0DFA91-85F5-4C63-AE93-6F1657668455}" dt="2026-03-19T10:04:34.304" v="306" actId="14100"/>
+          <ac:picMkLst>
+            <pc:docMk/>
+            <pc:sldMk cId="1846346669" sldId="272"/>
+            <ac:picMk id="3" creationId="{5D7F6DA0-6DE5-C723-C6CD-463C4E2CD1E4}"/>
+          </ac:picMkLst>
+        </pc:picChg>
+        <pc:picChg chg="del">
+          <ac:chgData name="Bellamkonda Satya sai venkateswarlu" userId="a00ae827de090eec" providerId="LiveId" clId="{2E0DFA91-85F5-4C63-AE93-6F1657668455}" dt="2026-03-19T10:04:03" v="303" actId="478"/>
+          <ac:picMkLst>
+            <pc:docMk/>
+            <pc:sldMk cId="1846346669" sldId="272"/>
+            <ac:picMk id="5" creationId="{4299CA50-3F12-C495-5270-0FD32627CB29}"/>
+          </ac:picMkLst>
+        </pc:picChg>
+        <pc:picChg chg="del">
+          <ac:chgData name="Bellamkonda Satya sai venkateswarlu" userId="a00ae827de090eec" providerId="LiveId" clId="{2E0DFA91-85F5-4C63-AE93-6F1657668455}" dt="2026-03-19T10:04:01.944" v="302" actId="478"/>
+          <ac:picMkLst>
+            <pc:docMk/>
+            <pc:sldMk cId="1846346669" sldId="272"/>
+            <ac:picMk id="9" creationId="{698C33D2-F6FA-7B8A-E17C-09686A68EE78}"/>
+          </ac:picMkLst>
+        </pc:picChg>
+        <pc:picChg chg="del">
+          <ac:chgData name="Bellamkonda Satya sai venkateswarlu" userId="a00ae827de090eec" providerId="LiveId" clId="{2E0DFA91-85F5-4C63-AE93-6F1657668455}" dt="2026-03-19T10:04:00.692" v="301" actId="478"/>
+          <ac:picMkLst>
+            <pc:docMk/>
+            <pc:sldMk cId="1846346669" sldId="272"/>
+            <ac:picMk id="11" creationId="{8060230C-7669-E6A5-DA8A-5D4077AABD9D}"/>
+          </ac:picMkLst>
+        </pc:picChg>
+      </pc:sldChg>
+      <pc:sldChg chg="addSp delSp modSp new mod">
+        <pc:chgData name="Bellamkonda Satya sai venkateswarlu" userId="a00ae827de090eec" providerId="LiveId" clId="{2E0DFA91-85F5-4C63-AE93-6F1657668455}" dt="2026-03-19T10:05:26.921" v="314" actId="14100"/>
+        <pc:sldMkLst>
+          <pc:docMk/>
+          <pc:sldMk cId="942085794" sldId="276"/>
+        </pc:sldMkLst>
+        <pc:spChg chg="del">
+          <ac:chgData name="Bellamkonda Satya sai venkateswarlu" userId="a00ae827de090eec" providerId="LiveId" clId="{2E0DFA91-85F5-4C63-AE93-6F1657668455}" dt="2026-03-19T10:05:15.557" v="308" actId="478"/>
+          <ac:spMkLst>
+            <pc:docMk/>
+            <pc:sldMk cId="942085794" sldId="276"/>
+            <ac:spMk id="2" creationId="{30A73E16-8685-3D24-602A-45316559F53E}"/>
+          </ac:spMkLst>
+        </pc:spChg>
+        <pc:spChg chg="add del">
+          <ac:chgData name="Bellamkonda Satya sai venkateswarlu" userId="a00ae827de090eec" providerId="LiveId" clId="{2E0DFA91-85F5-4C63-AE93-6F1657668455}" dt="2026-03-19T10:05:21.224" v="311" actId="478"/>
+          <ac:spMkLst>
+            <pc:docMk/>
+            <pc:sldMk cId="942085794" sldId="276"/>
+            <ac:spMk id="3" creationId="{F87E0594-DBE7-0453-FBAA-703505D2150E}"/>
+          </ac:spMkLst>
+        </pc:spChg>
+        <pc:picChg chg="add del mod ord">
+          <ac:chgData name="Bellamkonda Satya sai venkateswarlu" userId="a00ae827de090eec" providerId="LiveId" clId="{2E0DFA91-85F5-4C63-AE93-6F1657668455}" dt="2026-03-19T10:05:19.640" v="310" actId="22"/>
+          <ac:picMkLst>
+            <pc:docMk/>
+            <pc:sldMk cId="942085794" sldId="276"/>
+            <ac:picMk id="5" creationId="{367821F0-7463-959F-C54A-552C33F453A0}"/>
+          </ac:picMkLst>
+        </pc:picChg>
+        <pc:picChg chg="add mod">
+          <ac:chgData name="Bellamkonda Satya sai venkateswarlu" userId="a00ae827de090eec" providerId="LiveId" clId="{2E0DFA91-85F5-4C63-AE93-6F1657668455}" dt="2026-03-19T10:05:26.921" v="314" actId="14100"/>
+          <ac:picMkLst>
+            <pc:docMk/>
+            <pc:sldMk cId="942085794" sldId="276"/>
+            <ac:picMk id="7" creationId="{79BB4D6A-BCA5-5D43-B922-4FBD417D850D}"/>
           </ac:picMkLst>
         </pc:picChg>
       </pc:sldChg>
@@ -301,7 +490,7 @@
           <a:p>
             <a:fld id="{71CFA29C-1A86-49DE-9255-536F45CBFC5C}" type="datetimeFigureOut">
               <a:rPr lang="en-US" smtClean="0"/>
-              <a:t>3/18/2026</a:t>
+              <a:t>3/19/2026</a:t>
             </a:fld>
             <a:endParaRPr lang="en-US"/>
           </a:p>
@@ -751,7 +940,7 @@
           <a:p>
             <a:fld id="{CD2FC169-25D4-4F65-B179-FE278AF4269D}" type="datetimeFigureOut">
               <a:rPr lang="en-US" smtClean="0"/>
-              <a:t>3/18/2026</a:t>
+              <a:t>3/19/2026</a:t>
             </a:fld>
             <a:endParaRPr lang="en-US"/>
           </a:p>
@@ -1029,7 +1218,7 @@
           <a:p>
             <a:fld id="{CD2FC169-25D4-4F65-B179-FE278AF4269D}" type="datetimeFigureOut">
               <a:rPr lang="en-US" smtClean="0"/>
-              <a:t>3/18/2026</a:t>
+              <a:t>3/19/2026</a:t>
             </a:fld>
             <a:endParaRPr lang="en-US"/>
           </a:p>
@@ -1226,7 +1415,7 @@
           <a:p>
             <a:fld id="{CD2FC169-25D4-4F65-B179-FE278AF4269D}" type="datetimeFigureOut">
               <a:rPr lang="en-US" smtClean="0"/>
-              <a:t>3/18/2026</a:t>
+              <a:t>3/19/2026</a:t>
             </a:fld>
             <a:endParaRPr lang="en-US"/>
           </a:p>
@@ -1497,7 +1686,7 @@
           <a:p>
             <a:fld id="{CD2FC169-25D4-4F65-B179-FE278AF4269D}" type="datetimeFigureOut">
               <a:rPr lang="en-US" smtClean="0"/>
-              <a:t>3/18/2026</a:t>
+              <a:t>3/19/2026</a:t>
             </a:fld>
             <a:endParaRPr lang="en-US"/>
           </a:p>
@@ -1832,7 +2021,7 @@
           <a:p>
             <a:fld id="{CD2FC169-25D4-4F65-B179-FE278AF4269D}" type="datetimeFigureOut">
               <a:rPr lang="en-US" smtClean="0"/>
-              <a:t>3/18/2026</a:t>
+              <a:t>3/19/2026</a:t>
             </a:fld>
             <a:endParaRPr lang="en-US"/>
           </a:p>
@@ -2445,7 +2634,7 @@
           <a:p>
             <a:fld id="{CD2FC169-25D4-4F65-B179-FE278AF4269D}" type="datetimeFigureOut">
               <a:rPr lang="en-US" smtClean="0"/>
-              <a:t>3/18/2026</a:t>
+              <a:t>3/19/2026</a:t>
             </a:fld>
             <a:endParaRPr lang="en-US"/>
           </a:p>
@@ -3295,7 +3484,7 @@
           <a:p>
             <a:fld id="{CD2FC169-25D4-4F65-B179-FE278AF4269D}" type="datetimeFigureOut">
               <a:rPr lang="en-US" smtClean="0"/>
-              <a:t>3/18/2026</a:t>
+              <a:t>3/19/2026</a:t>
             </a:fld>
             <a:endParaRPr lang="en-US"/>
           </a:p>
@@ -3468,7 +3657,7 @@
           <a:p>
             <a:fld id="{CD2FC169-25D4-4F65-B179-FE278AF4269D}" type="datetimeFigureOut">
               <a:rPr lang="en-US" smtClean="0"/>
-              <a:t>3/18/2026</a:t>
+              <a:t>3/19/2026</a:t>
             </a:fld>
             <a:endParaRPr lang="en-US"/>
           </a:p>
@@ -3651,7 +3840,7 @@
           <a:p>
             <a:fld id="{CD2FC169-25D4-4F65-B179-FE278AF4269D}" type="datetimeFigureOut">
               <a:rPr lang="en-US" smtClean="0"/>
-              <a:t>3/18/2026</a:t>
+              <a:t>3/19/2026</a:t>
             </a:fld>
             <a:endParaRPr lang="en-US"/>
           </a:p>
@@ -3824,7 +4013,7 @@
           <a:p>
             <a:fld id="{CD2FC169-25D4-4F65-B179-FE278AF4269D}" type="datetimeFigureOut">
               <a:rPr lang="en-US" smtClean="0"/>
-              <a:t>3/18/2026</a:t>
+              <a:t>3/19/2026</a:t>
             </a:fld>
             <a:endParaRPr lang="en-US"/>
           </a:p>
@@ -4071,7 +4260,7 @@
           <a:p>
             <a:fld id="{CD2FC169-25D4-4F65-B179-FE278AF4269D}" type="datetimeFigureOut">
               <a:rPr lang="en-US" smtClean="0"/>
-              <a:t>3/18/2026</a:t>
+              <a:t>3/19/2026</a:t>
             </a:fld>
             <a:endParaRPr lang="en-US"/>
           </a:p>
@@ -4366,7 +4555,7 @@
           <a:p>
             <a:fld id="{CD2FC169-25D4-4F65-B179-FE278AF4269D}" type="datetimeFigureOut">
               <a:rPr lang="en-US" smtClean="0"/>
-              <a:t>3/18/2026</a:t>
+              <a:t>3/19/2026</a:t>
             </a:fld>
             <a:endParaRPr lang="en-US"/>
           </a:p>
@@ -4807,7 +4996,7 @@
           <a:p>
             <a:fld id="{CD2FC169-25D4-4F65-B179-FE278AF4269D}" type="datetimeFigureOut">
               <a:rPr lang="en-US" smtClean="0"/>
-              <a:t>3/18/2026</a:t>
+              <a:t>3/19/2026</a:t>
             </a:fld>
             <a:endParaRPr lang="en-US"/>
           </a:p>
@@ -4928,7 +5117,7 @@
           <a:p>
             <a:fld id="{CD2FC169-25D4-4F65-B179-FE278AF4269D}" type="datetimeFigureOut">
               <a:rPr lang="en-US" smtClean="0"/>
-              <a:t>3/18/2026</a:t>
+              <a:t>3/19/2026</a:t>
             </a:fld>
             <a:endParaRPr lang="en-US"/>
           </a:p>
@@ -5026,7 +5215,7 @@
           <a:p>
             <a:fld id="{CD2FC169-25D4-4F65-B179-FE278AF4269D}" type="datetimeFigureOut">
               <a:rPr lang="en-US" smtClean="0"/>
-              <a:t>3/18/2026</a:t>
+              <a:t>3/19/2026</a:t>
             </a:fld>
             <a:endParaRPr lang="en-US"/>
           </a:p>
@@ -5308,7 +5497,7 @@
           <a:p>
             <a:fld id="{CD2FC169-25D4-4F65-B179-FE278AF4269D}" type="datetimeFigureOut">
               <a:rPr lang="en-US" smtClean="0"/>
-              <a:t>3/18/2026</a:t>
+              <a:t>3/19/2026</a:t>
             </a:fld>
             <a:endParaRPr lang="en-US"/>
           </a:p>
@@ -5586,7 +5775,7 @@
           <a:p>
             <a:fld id="{CD2FC169-25D4-4F65-B179-FE278AF4269D}" type="datetimeFigureOut">
               <a:rPr lang="en-US" smtClean="0"/>
-              <a:t>3/18/2026</a:t>
+              <a:t>3/19/2026</a:t>
             </a:fld>
             <a:endParaRPr lang="en-US"/>
           </a:p>
@@ -6032,7 +6221,7 @@
           <a:p>
             <a:fld id="{CD2FC169-25D4-4F65-B179-FE278AF4269D}" type="datetimeFigureOut">
               <a:rPr lang="en-US" smtClean="0"/>
-              <a:t>3/18/2026</a:t>
+              <a:t>3/19/2026</a:t>
             </a:fld>
             <a:endParaRPr lang="en-US"/>
           </a:p>
@@ -6605,98 +6794,40 @@
           <a:chExt cx="0" cy="0"/>
         </a:xfrm>
       </p:grpSpPr>
-      <p:sp>
-        <p:nvSpPr>
-          <p:cNvPr id="2" name="Title 1">
+      <p:pic>
+        <p:nvPicPr>
+          <p:cNvPr id="3" name="Picture 2">
             <a:extLst>
               <a:ext uri="{FF2B5EF4-FFF2-40B4-BE49-F238E27FC236}">
-                <a16:creationId xmlns:a16="http://schemas.microsoft.com/office/drawing/2014/main" id="{B70B12F5-308B-AA10-CB52-9325D6F6ED3B}"/>
+                <a16:creationId xmlns:a16="http://schemas.microsoft.com/office/drawing/2014/main" id="{5D7F6DA0-6DE5-C723-C6CD-463C4E2CD1E4}"/>
               </a:ext>
             </a:extLst>
           </p:cNvPr>
-          <p:cNvSpPr>
-            <a:spLocks noGrp="1"/>
-          </p:cNvSpPr>
-          <p:nvPr>
-            <p:ph type="title"/>
-          </p:nvPr>
-        </p:nvSpPr>
-        <p:spPr/>
-        <p:txBody>
-          <a:bodyPr/>
-          <a:lstStyle/>
-          <a:p>
-            <a:r>
-              <a:rPr lang="en-US" dirty="0"/>
-              <a:t>Alerts/Monitoring/Logging</a:t>
-            </a:r>
-          </a:p>
-        </p:txBody>
-      </p:sp>
-      <p:sp>
-        <p:nvSpPr>
-          <p:cNvPr id="3" name="Content Placeholder 2">
-            <a:extLst>
-              <a:ext uri="{FF2B5EF4-FFF2-40B4-BE49-F238E27FC236}">
-                <a16:creationId xmlns:a16="http://schemas.microsoft.com/office/drawing/2014/main" id="{2F123050-61ED-80DA-2803-6291D24F285C}"/>
-              </a:ext>
-            </a:extLst>
-          </p:cNvPr>
-          <p:cNvSpPr>
-            <a:spLocks noGrp="1"/>
-          </p:cNvSpPr>
-          <p:nvPr>
-            <p:ph idx="1"/>
-          </p:nvPr>
-        </p:nvSpPr>
-        <p:spPr/>
-        <p:txBody>
-          <a:bodyPr>
-            <a:normAutofit/>
-          </a:bodyPr>
-          <a:lstStyle/>
-          <a:p>
-            <a:r>
-              <a:rPr lang="en-US" dirty="0"/>
-              <a:t> Implemented real-time anomaly detection monitoring to track abnormal IoT sensor readings.</a:t>
-            </a:r>
-          </a:p>
-          <a:p>
-            <a:r>
-              <a:rPr lang="en-US" dirty="0"/>
-              <a:t> Configured Slack notifications to alert the team when anomaly rates exceed defined thresholds.</a:t>
-            </a:r>
-          </a:p>
-          <a:p>
-            <a:r>
-              <a:rPr lang="en-US" dirty="0"/>
-              <a:t>Monitored pipeline execution status using Apache Airflow DAG runs.</a:t>
-            </a:r>
-          </a:p>
-          <a:p>
-            <a:r>
-              <a:rPr lang="en-US" dirty="0"/>
-              <a:t>Tracked data processing stages across Bronze, Silver, and Gold layers.</a:t>
-            </a:r>
-          </a:p>
-          <a:p>
-            <a:r>
-              <a:rPr lang="en-US" dirty="0"/>
-              <a:t> Logged pipeline activities and processing details for debugging and auditing.</a:t>
-            </a:r>
-          </a:p>
-          <a:p>
-            <a:r>
-              <a:rPr lang="en-US" dirty="0"/>
-              <a:t>Enabled continuous monitoring of device performance and sensor behavior through dashboards.</a:t>
-            </a:r>
-          </a:p>
-        </p:txBody>
-      </p:sp>
+          <p:cNvPicPr>
+            <a:picLocks noChangeAspect="1"/>
+          </p:cNvPicPr>
+          <p:nvPr/>
+        </p:nvPicPr>
+        <p:blipFill>
+          <a:blip r:embed="rId2"/>
+          <a:stretch>
+            <a:fillRect/>
+          </a:stretch>
+        </p:blipFill>
+        <p:spPr>
+          <a:xfrm>
+            <a:off x="0" y="-1"/>
+            <a:ext cx="12192000" cy="7032171"/>
+          </a:xfrm>
+          <a:prstGeom prst="rect">
+            <a:avLst/>
+          </a:prstGeom>
+        </p:spPr>
+      </p:pic>
     </p:spTree>
     <p:extLst>
       <p:ext uri="{BB962C8B-B14F-4D97-AF65-F5344CB8AC3E}">
-        <p14:creationId xmlns:p14="http://schemas.microsoft.com/office/powerpoint/2010/main" val="2437225187"/>
+        <p14:creationId xmlns:p14="http://schemas.microsoft.com/office/powerpoint/2010/main" val="1846346669"/>
       </p:ext>
     </p:extLst>
   </p:cSld>
@@ -6726,88 +6857,12 @@
           <a:chExt cx="0" cy="0"/>
         </a:xfrm>
       </p:grpSpPr>
-      <p:sp>
-        <p:nvSpPr>
-          <p:cNvPr id="2" name="Title 1">
+      <p:pic>
+        <p:nvPicPr>
+          <p:cNvPr id="7" name="Picture 6">
             <a:extLst>
               <a:ext uri="{FF2B5EF4-FFF2-40B4-BE49-F238E27FC236}">
-                <a16:creationId xmlns:a16="http://schemas.microsoft.com/office/drawing/2014/main" id="{BD1337CC-5219-A396-ED9C-A81390FE8325}"/>
-              </a:ext>
-            </a:extLst>
-          </p:cNvPr>
-          <p:cNvSpPr>
-            <a:spLocks noGrp="1"/>
-          </p:cNvSpPr>
-          <p:nvPr>
-            <p:ph type="title"/>
-          </p:nvPr>
-        </p:nvSpPr>
-        <p:spPr>
-          <a:xfrm>
-            <a:off x="711426" y="80024"/>
-            <a:ext cx="9404723" cy="1400530"/>
-          </a:xfrm>
-        </p:spPr>
-        <p:txBody>
-          <a:bodyPr/>
-          <a:lstStyle/>
-          <a:p>
-            <a:r>
-              <a:rPr lang="en-US" dirty="0"/>
-              <a:t>                     </a:t>
-            </a:r>
-            <a:r>
-              <a:rPr lang="en-US" dirty="0" err="1"/>
-              <a:t>DashBoards</a:t>
-            </a:r>
-            <a:endParaRPr lang="en-US" dirty="0"/>
-          </a:p>
-        </p:txBody>
-      </p:sp>
-      <p:pic>
-        <p:nvPicPr>
-          <p:cNvPr id="13" name="Content Placeholder 12">
-            <a:extLst>
-              <a:ext uri="{FF2B5EF4-FFF2-40B4-BE49-F238E27FC236}">
-                <a16:creationId xmlns:a16="http://schemas.microsoft.com/office/drawing/2014/main" id="{AAB83ED1-30D2-8534-A3D4-A0099D36A430}"/>
-              </a:ext>
-            </a:extLst>
-          </p:cNvPr>
-          <p:cNvPicPr>
-            <a:picLocks noGrp="1" noChangeAspect="1"/>
-          </p:cNvPicPr>
-          <p:nvPr>
-            <p:ph idx="1"/>
-          </p:nvPr>
-        </p:nvPicPr>
-        <p:blipFill>
-          <a:blip r:embed="rId2">
-            <a:extLst>
-              <a:ext uri="{28A0092B-C50C-407E-A947-70E740481C1C}">
-                <a14:useLocalDpi xmlns:a14="http://schemas.microsoft.com/office/drawing/2010/main" val="0"/>
-              </a:ext>
-            </a:extLst>
-          </a:blip>
-          <a:stretch>
-            <a:fillRect/>
-          </a:stretch>
-        </p:blipFill>
-        <p:spPr>
-          <a:xfrm>
-            <a:off x="66555" y="2812611"/>
-            <a:ext cx="2628900" cy="1600200"/>
-          </a:xfrm>
-          <a:prstGeom prst="rect">
-            <a:avLst/>
-          </a:prstGeom>
-        </p:spPr>
-      </p:pic>
-      <p:pic>
-        <p:nvPicPr>
-          <p:cNvPr id="15" name="Picture 14">
-            <a:extLst>
-              <a:ext uri="{FF2B5EF4-FFF2-40B4-BE49-F238E27FC236}">
-                <a16:creationId xmlns:a16="http://schemas.microsoft.com/office/drawing/2014/main" id="{C32A20B8-909D-40BE-7677-2B79CCC41BFF}"/>
+                <a16:creationId xmlns:a16="http://schemas.microsoft.com/office/drawing/2014/main" id="{79BB4D6A-BCA5-5D43-B922-4FBD417D850D}"/>
               </a:ext>
             </a:extLst>
           </p:cNvPr>
@@ -6817,93 +6872,15 @@
           <p:nvPr/>
         </p:nvPicPr>
         <p:blipFill>
-          <a:blip r:embed="rId3">
-            <a:extLst>
-              <a:ext uri="{28A0092B-C50C-407E-A947-70E740481C1C}">
-                <a14:useLocalDpi xmlns:a14="http://schemas.microsoft.com/office/drawing/2010/main" val="0"/>
-              </a:ext>
-            </a:extLst>
-          </a:blip>
+          <a:blip r:embed="rId2"/>
           <a:stretch>
             <a:fillRect/>
           </a:stretch>
         </p:blipFill>
         <p:spPr>
           <a:xfrm>
-            <a:off x="9055326" y="4125493"/>
-            <a:ext cx="2628900" cy="1600200"/>
-          </a:xfrm>
-          <a:prstGeom prst="rect">
-            <a:avLst/>
-          </a:prstGeom>
-        </p:spPr>
-      </p:pic>
-      <p:pic>
-        <p:nvPicPr>
-          <p:cNvPr id="17" name="Picture 16">
-            <a:extLst>
-              <a:ext uri="{FF2B5EF4-FFF2-40B4-BE49-F238E27FC236}">
-                <a16:creationId xmlns:a16="http://schemas.microsoft.com/office/drawing/2014/main" id="{FFFBA5E4-6FF9-7F63-43D3-92A79FED5D5F}"/>
-              </a:ext>
-            </a:extLst>
-          </p:cNvPr>
-          <p:cNvPicPr>
-            <a:picLocks noChangeAspect="1"/>
-          </p:cNvPicPr>
-          <p:nvPr/>
-        </p:nvPicPr>
-        <p:blipFill>
-          <a:blip r:embed="rId4">
-            <a:extLst>
-              <a:ext uri="{28A0092B-C50C-407E-A947-70E740481C1C}">
-                <a14:useLocalDpi xmlns:a14="http://schemas.microsoft.com/office/drawing/2010/main" val="0"/>
-              </a:ext>
-            </a:extLst>
-          </a:blip>
-          <a:stretch>
-            <a:fillRect/>
-          </a:stretch>
-        </p:blipFill>
-        <p:spPr>
-          <a:xfrm>
-            <a:off x="9055326" y="1828800"/>
-            <a:ext cx="2628900" cy="1600200"/>
-          </a:xfrm>
-          <a:prstGeom prst="rect">
-            <a:avLst/>
-          </a:prstGeom>
-        </p:spPr>
-      </p:pic>
-      <p:pic>
-        <p:nvPicPr>
-          <p:cNvPr id="19" name="Picture 18">
-            <a:extLst>
-              <a:ext uri="{FF2B5EF4-FFF2-40B4-BE49-F238E27FC236}">
-                <a16:creationId xmlns:a16="http://schemas.microsoft.com/office/drawing/2014/main" id="{A351D55C-D23D-B812-7D26-A3DFBA90C3C5}"/>
-              </a:ext>
-            </a:extLst>
-          </p:cNvPr>
-          <p:cNvPicPr>
-            <a:picLocks noChangeAspect="1"/>
-          </p:cNvPicPr>
-          <p:nvPr/>
-        </p:nvPicPr>
-        <p:blipFill>
-          <a:blip r:embed="rId5">
-            <a:extLst>
-              <a:ext uri="{28A0092B-C50C-407E-A947-70E740481C1C}">
-                <a14:useLocalDpi xmlns:a14="http://schemas.microsoft.com/office/drawing/2010/main" val="0"/>
-              </a:ext>
-            </a:extLst>
-          </a:blip>
-          <a:stretch>
-            <a:fillRect/>
-          </a:stretch>
-        </p:blipFill>
-        <p:spPr>
-          <a:xfrm>
-            <a:off x="2843737" y="1368538"/>
-            <a:ext cx="5915025" cy="5029200"/>
+            <a:off x="0" y="185058"/>
+            <a:ext cx="12192000" cy="6672942"/>
           </a:xfrm>
           <a:prstGeom prst="rect">
             <a:avLst/>
@@ -6913,7 +6890,7 @@
     </p:spTree>
     <p:extLst>
       <p:ext uri="{BB962C8B-B14F-4D97-AF65-F5344CB8AC3E}">
-        <p14:creationId xmlns:p14="http://schemas.microsoft.com/office/powerpoint/2010/main" val="1242523886"/>
+        <p14:creationId xmlns:p14="http://schemas.microsoft.com/office/powerpoint/2010/main" val="942085794"/>
       </p:ext>
     </p:extLst>
   </p:cSld>
@@ -6943,118 +6920,110 @@
           <a:chExt cx="0" cy="0"/>
         </a:xfrm>
       </p:grpSpPr>
-      <p:pic>
-        <p:nvPicPr>
-          <p:cNvPr id="5" name="Picture 4">
+      <p:sp>
+        <p:nvSpPr>
+          <p:cNvPr id="2" name="Title 1">
             <a:extLst>
               <a:ext uri="{FF2B5EF4-FFF2-40B4-BE49-F238E27FC236}">
-                <a16:creationId xmlns:a16="http://schemas.microsoft.com/office/drawing/2014/main" id="{4299CA50-3F12-C495-5270-0FD32627CB29}"/>
+                <a16:creationId xmlns:a16="http://schemas.microsoft.com/office/drawing/2014/main" id="{B128F91E-CAB3-B25F-B868-6337E56072CD}"/>
               </a:ext>
             </a:extLst>
           </p:cNvPr>
-          <p:cNvPicPr>
-            <a:picLocks noChangeAspect="1"/>
-          </p:cNvPicPr>
-          <p:nvPr/>
-        </p:nvPicPr>
-        <p:blipFill>
-          <a:blip r:embed="rId2">
-            <a:extLst>
-              <a:ext uri="{28A0092B-C50C-407E-A947-70E740481C1C}">
-                <a14:useLocalDpi xmlns:a14="http://schemas.microsoft.com/office/drawing/2010/main" val="0"/>
-              </a:ext>
-            </a:extLst>
-          </a:blip>
-          <a:stretch>
-            <a:fillRect/>
-          </a:stretch>
-        </p:blipFill>
-        <p:spPr>
-          <a:xfrm>
-            <a:off x="2601686" y="3526971"/>
-            <a:ext cx="6471557" cy="3233058"/>
-          </a:xfrm>
-          <a:prstGeom prst="rect">
-            <a:avLst/>
-          </a:prstGeom>
-        </p:spPr>
-      </p:pic>
-      <p:pic>
-        <p:nvPicPr>
-          <p:cNvPr id="9" name="Picture 8">
+          <p:cNvSpPr>
+            <a:spLocks noGrp="1"/>
+          </p:cNvSpPr>
+          <p:nvPr>
+            <p:ph type="title"/>
+          </p:nvPr>
+        </p:nvSpPr>
+        <p:spPr/>
+        <p:txBody>
+          <a:bodyPr/>
+          <a:lstStyle/>
+          <a:p>
+            <a:r>
+              <a:rPr lang="en-US" dirty="0"/>
+              <a:t>        Pipeline Orchestration</a:t>
+            </a:r>
+          </a:p>
+        </p:txBody>
+      </p:sp>
+      <p:sp>
+        <p:nvSpPr>
+          <p:cNvPr id="3" name="Content Placeholder 2">
             <a:extLst>
               <a:ext uri="{FF2B5EF4-FFF2-40B4-BE49-F238E27FC236}">
-                <a16:creationId xmlns:a16="http://schemas.microsoft.com/office/drawing/2014/main" id="{698C33D2-F6FA-7B8A-E17C-09686A68EE78}"/>
+                <a16:creationId xmlns:a16="http://schemas.microsoft.com/office/drawing/2014/main" id="{EA46F803-6CAB-2315-3E2D-54A88F888775}"/>
               </a:ext>
             </a:extLst>
           </p:cNvPr>
-          <p:cNvPicPr>
-            <a:picLocks noChangeAspect="1"/>
-          </p:cNvPicPr>
-          <p:nvPr/>
-        </p:nvPicPr>
-        <p:blipFill>
-          <a:blip r:embed="rId3">
-            <a:extLst>
-              <a:ext uri="{28A0092B-C50C-407E-A947-70E740481C1C}">
-                <a14:useLocalDpi xmlns:a14="http://schemas.microsoft.com/office/drawing/2010/main" val="0"/>
-              </a:ext>
-            </a:extLst>
-          </a:blip>
-          <a:stretch>
-            <a:fillRect/>
-          </a:stretch>
-        </p:blipFill>
-        <p:spPr>
-          <a:xfrm>
-            <a:off x="6365421" y="0"/>
-            <a:ext cx="5693229" cy="3429000"/>
-          </a:xfrm>
-          <a:prstGeom prst="rect">
-            <a:avLst/>
-          </a:prstGeom>
-        </p:spPr>
-      </p:pic>
-      <p:pic>
-        <p:nvPicPr>
-          <p:cNvPr id="11" name="Picture 10">
-            <a:extLst>
-              <a:ext uri="{FF2B5EF4-FFF2-40B4-BE49-F238E27FC236}">
-                <a16:creationId xmlns:a16="http://schemas.microsoft.com/office/drawing/2014/main" id="{8060230C-7669-E6A5-DA8A-5D4077AABD9D}"/>
-              </a:ext>
-            </a:extLst>
-          </p:cNvPr>
-          <p:cNvPicPr>
-            <a:picLocks noChangeAspect="1"/>
-          </p:cNvPicPr>
-          <p:nvPr/>
-        </p:nvPicPr>
-        <p:blipFill>
-          <a:blip r:embed="rId4">
-            <a:extLst>
-              <a:ext uri="{28A0092B-C50C-407E-A947-70E740481C1C}">
-                <a14:useLocalDpi xmlns:a14="http://schemas.microsoft.com/office/drawing/2010/main" val="0"/>
-              </a:ext>
-            </a:extLst>
-          </a:blip>
-          <a:stretch>
-            <a:fillRect/>
-          </a:stretch>
-        </p:blipFill>
-        <p:spPr>
-          <a:xfrm>
-            <a:off x="180975" y="0"/>
-            <a:ext cx="5915025" cy="3429000"/>
-          </a:xfrm>
-          <a:prstGeom prst="rect">
-            <a:avLst/>
-          </a:prstGeom>
-        </p:spPr>
-      </p:pic>
+          <p:cNvSpPr>
+            <a:spLocks noGrp="1"/>
+          </p:cNvSpPr>
+          <p:nvPr>
+            <p:ph idx="1"/>
+          </p:nvPr>
+        </p:nvSpPr>
+        <p:spPr/>
+        <p:txBody>
+          <a:bodyPr>
+            <a:normAutofit fontScale="92500" lnSpcReduction="10000"/>
+          </a:bodyPr>
+          <a:lstStyle/>
+          <a:p>
+            <a:r>
+              <a:rPr lang="en-US" dirty="0"/>
+              <a:t>Designed an automated data pipeline workflow to manage the end-to-end IoT data processing.</a:t>
+            </a:r>
+          </a:p>
+          <a:p>
+            <a:r>
+              <a:rPr lang="en-US" dirty="0"/>
+              <a:t>Used Apache Airflow DAG to orchestrate different pipeline stages. </a:t>
+            </a:r>
+          </a:p>
+          <a:p>
+            <a:r>
+              <a:rPr lang="en-US" dirty="0"/>
+              <a:t>Scheduled pipeline execution to run automatically at defined intervals.</a:t>
+            </a:r>
+          </a:p>
+          <a:p>
+            <a:r>
+              <a:rPr lang="en-US" dirty="0"/>
+              <a:t> Triggered Databricks notebooks for Bronze, Silver, and Gold layer processing.</a:t>
+            </a:r>
+          </a:p>
+          <a:p>
+            <a:r>
+              <a:rPr lang="en-US" dirty="0"/>
+              <a:t>Managed task dependencies to ensure proper execution order of the pipeline</a:t>
+            </a:r>
+          </a:p>
+          <a:p>
+            <a:r>
+              <a:rPr lang="en-US" dirty="0"/>
+              <a:t> Implemented monitoring of pipeline runs and task execution status.</a:t>
+            </a:r>
+          </a:p>
+          <a:p>
+            <a:r>
+              <a:rPr lang="en-US" dirty="0"/>
+              <a:t> Integrated Slack notifications for pipeline alerts and anomaly events.</a:t>
+            </a:r>
+          </a:p>
+          <a:p>
+            <a:r>
+              <a:rPr lang="en-US" dirty="0"/>
+              <a:t> Enabled reliable and scalable workflow automation for continuous data processing.</a:t>
+            </a:r>
+          </a:p>
+        </p:txBody>
+      </p:sp>
     </p:spTree>
     <p:extLst>
       <p:ext uri="{BB962C8B-B14F-4D97-AF65-F5344CB8AC3E}">
-        <p14:creationId xmlns:p14="http://schemas.microsoft.com/office/powerpoint/2010/main" val="1846346669"/>
+        <p14:creationId xmlns:p14="http://schemas.microsoft.com/office/powerpoint/2010/main" val="791712982"/>
       </p:ext>
     </p:extLst>
   </p:cSld>
@@ -7089,7 +7058,7 @@
           <p:cNvPr id="2" name="Title 1">
             <a:extLst>
               <a:ext uri="{FF2B5EF4-FFF2-40B4-BE49-F238E27FC236}">
-                <a16:creationId xmlns:a16="http://schemas.microsoft.com/office/drawing/2014/main" id="{B8E31C44-94DB-0422-7744-376B46A1AD71}"/>
+                <a16:creationId xmlns:a16="http://schemas.microsoft.com/office/drawing/2014/main" id="{B70B12F5-308B-AA10-CB52-9325D6F6ED3B}"/>
               </a:ext>
             </a:extLst>
           </p:cNvPr>
@@ -7107,7 +7076,7 @@
           <a:p>
             <a:r>
               <a:rPr lang="en-US" dirty="0"/>
-              <a:t>                      Testing</a:t>
+              <a:t>Alerts/Monitoring/Logging</a:t>
             </a:r>
           </a:p>
         </p:txBody>
@@ -7117,7 +7086,7 @@
           <p:cNvPr id="3" name="Content Placeholder 2">
             <a:extLst>
               <a:ext uri="{FF2B5EF4-FFF2-40B4-BE49-F238E27FC236}">
-                <a16:creationId xmlns:a16="http://schemas.microsoft.com/office/drawing/2014/main" id="{E01DA643-2CB2-46E6-7ED6-6DD18D52A287}"/>
+                <a16:creationId xmlns:a16="http://schemas.microsoft.com/office/drawing/2014/main" id="{2F123050-61ED-80DA-2803-6291D24F285C}"/>
               </a:ext>
             </a:extLst>
           </p:cNvPr>
@@ -7128,53 +7097,46 @@
             <p:ph idx="1"/>
           </p:nvPr>
         </p:nvSpPr>
-        <p:spPr>
-          <a:xfrm>
-            <a:off x="1103312" y="2052918"/>
-            <a:ext cx="10065431" cy="4195481"/>
-          </a:xfrm>
-        </p:spPr>
+        <p:spPr/>
         <p:txBody>
           <a:bodyPr>
-            <a:noAutofit/>
+            <a:normAutofit/>
           </a:bodyPr>
           <a:lstStyle/>
           <a:p>
             <a:r>
-              <a:rPr lang="en-US" sz="2400" dirty="0"/>
-              <a:t>Developed </a:t>
-            </a:r>
-            <a:r>
-              <a:rPr lang="en-US" sz="2400" dirty="0" err="1"/>
-              <a:t>PyTest</a:t>
-            </a:r>
-            <a:r>
-              <a:rPr lang="en-US" sz="2400" dirty="0"/>
-              <a:t> unit tests to validate the Bronze, Silver, and Gold layer tables.</a:t>
-            </a:r>
-          </a:p>
-          <a:p>
-            <a:r>
-              <a:rPr lang="en-US" sz="2400" dirty="0"/>
-              <a:t> Verified that all required tables are created successfully in the pipeline.</a:t>
-            </a:r>
-          </a:p>
-          <a:p>
-            <a:r>
-              <a:rPr lang="en-US" sz="2400" dirty="0"/>
-              <a:t> Checked that data is properly loaded and row counts are greater than zero.</a:t>
-            </a:r>
-          </a:p>
-          <a:p>
-            <a:r>
-              <a:rPr lang="en-US" sz="2400" dirty="0"/>
-              <a:t>Ensured schema validation and correct column names across all tables.</a:t>
-            </a:r>
-          </a:p>
-          <a:p>
-            <a:r>
-              <a:rPr lang="en-US" sz="2400" dirty="0"/>
-              <a:t>Performed data quality checks such as duplicate detection and invalid value filtering.</a:t>
+              <a:rPr lang="en-US" dirty="0"/>
+              <a:t> Implemented real-time anomaly detection monitoring to track abnormal IoT sensor readings.</a:t>
+            </a:r>
+          </a:p>
+          <a:p>
+            <a:r>
+              <a:rPr lang="en-US" dirty="0"/>
+              <a:t> Configured Slack notifications to alert the team when anomaly rates exceed defined thresholds.</a:t>
+            </a:r>
+          </a:p>
+          <a:p>
+            <a:r>
+              <a:rPr lang="en-US" dirty="0"/>
+              <a:t>Monitored pipeline execution status using Apache Airflow DAG runs.</a:t>
+            </a:r>
+          </a:p>
+          <a:p>
+            <a:r>
+              <a:rPr lang="en-US" dirty="0"/>
+              <a:t>Tracked data processing stages across Bronze, Silver, and Gold layers.</a:t>
+            </a:r>
+          </a:p>
+          <a:p>
+            <a:r>
+              <a:rPr lang="en-US" dirty="0"/>
+              <a:t> Logged pipeline activities and processing details for debugging and auditing.</a:t>
+            </a:r>
+          </a:p>
+          <a:p>
+            <a:r>
+              <a:rPr lang="en-US" dirty="0"/>
+              <a:t>Enabled continuous monitoring of device performance and sensor behavior through dashboards.</a:t>
             </a:r>
           </a:p>
         </p:txBody>
@@ -7182,7 +7144,7 @@
     </p:spTree>
     <p:extLst>
       <p:ext uri="{BB962C8B-B14F-4D97-AF65-F5344CB8AC3E}">
-        <p14:creationId xmlns:p14="http://schemas.microsoft.com/office/powerpoint/2010/main" val="3043391216"/>
+        <p14:creationId xmlns:p14="http://schemas.microsoft.com/office/powerpoint/2010/main" val="2437225187"/>
       </p:ext>
     </p:extLst>
   </p:cSld>
@@ -7217,6 +7179,134 @@
           <p:cNvPr id="2" name="Title 1">
             <a:extLst>
               <a:ext uri="{FF2B5EF4-FFF2-40B4-BE49-F238E27FC236}">
+                <a16:creationId xmlns:a16="http://schemas.microsoft.com/office/drawing/2014/main" id="{B8E31C44-94DB-0422-7744-376B46A1AD71}"/>
+              </a:ext>
+            </a:extLst>
+          </p:cNvPr>
+          <p:cNvSpPr>
+            <a:spLocks noGrp="1"/>
+          </p:cNvSpPr>
+          <p:nvPr>
+            <p:ph type="title"/>
+          </p:nvPr>
+        </p:nvSpPr>
+        <p:spPr/>
+        <p:txBody>
+          <a:bodyPr/>
+          <a:lstStyle/>
+          <a:p>
+            <a:r>
+              <a:rPr lang="en-US" dirty="0"/>
+              <a:t>                      Testing</a:t>
+            </a:r>
+          </a:p>
+        </p:txBody>
+      </p:sp>
+      <p:sp>
+        <p:nvSpPr>
+          <p:cNvPr id="3" name="Content Placeholder 2">
+            <a:extLst>
+              <a:ext uri="{FF2B5EF4-FFF2-40B4-BE49-F238E27FC236}">
+                <a16:creationId xmlns:a16="http://schemas.microsoft.com/office/drawing/2014/main" id="{E01DA643-2CB2-46E6-7ED6-6DD18D52A287}"/>
+              </a:ext>
+            </a:extLst>
+          </p:cNvPr>
+          <p:cNvSpPr>
+            <a:spLocks noGrp="1"/>
+          </p:cNvSpPr>
+          <p:nvPr>
+            <p:ph idx="1"/>
+          </p:nvPr>
+        </p:nvSpPr>
+        <p:spPr>
+          <a:xfrm>
+            <a:off x="1103312" y="2052918"/>
+            <a:ext cx="10065431" cy="4195481"/>
+          </a:xfrm>
+        </p:spPr>
+        <p:txBody>
+          <a:bodyPr>
+            <a:noAutofit/>
+          </a:bodyPr>
+          <a:lstStyle/>
+          <a:p>
+            <a:r>
+              <a:rPr lang="en-US" sz="2400" dirty="0"/>
+              <a:t>Developed </a:t>
+            </a:r>
+            <a:r>
+              <a:rPr lang="en-US" sz="2400" dirty="0" err="1"/>
+              <a:t>PyTest</a:t>
+            </a:r>
+            <a:r>
+              <a:rPr lang="en-US" sz="2400" dirty="0"/>
+              <a:t> unit tests to validate the Bronze, Silver, and Gold layer tables.</a:t>
+            </a:r>
+          </a:p>
+          <a:p>
+            <a:r>
+              <a:rPr lang="en-US" sz="2400" dirty="0"/>
+              <a:t> Verified that all required tables are created successfully in the pipeline.</a:t>
+            </a:r>
+          </a:p>
+          <a:p>
+            <a:r>
+              <a:rPr lang="en-US" sz="2400" dirty="0"/>
+              <a:t> Checked that data is properly loaded and row counts are greater than zero.</a:t>
+            </a:r>
+          </a:p>
+          <a:p>
+            <a:r>
+              <a:rPr lang="en-US" sz="2400" dirty="0"/>
+              <a:t>Ensured schema validation and correct column names across all tables.</a:t>
+            </a:r>
+          </a:p>
+          <a:p>
+            <a:r>
+              <a:rPr lang="en-US" sz="2400" dirty="0"/>
+              <a:t>Performed data quality checks such as duplicate detection and invalid value filtering.</a:t>
+            </a:r>
+          </a:p>
+        </p:txBody>
+      </p:sp>
+    </p:spTree>
+    <p:extLst>
+      <p:ext uri="{BB962C8B-B14F-4D97-AF65-F5344CB8AC3E}">
+        <p14:creationId xmlns:p14="http://schemas.microsoft.com/office/powerpoint/2010/main" val="3043391216"/>
+      </p:ext>
+    </p:extLst>
+  </p:cSld>
+  <p:clrMapOvr>
+    <a:masterClrMapping/>
+  </p:clrMapOvr>
+  <p:transition spd="med">
+    <p:pull/>
+  </p:transition>
+</p:sld>
+</file>
+
+<file path=ppt/slides/slide15.xml><?xml version="1.0" encoding="utf-8"?>
+<p:sld xmlns:a="http://schemas.openxmlformats.org/drawingml/2006/main" xmlns:r="http://schemas.openxmlformats.org/officeDocument/2006/relationships" xmlns:p="http://schemas.openxmlformats.org/presentationml/2006/main">
+  <p:cSld>
+    <p:spTree>
+      <p:nvGrpSpPr>
+        <p:cNvPr id="1" name=""/>
+        <p:cNvGrpSpPr/>
+        <p:nvPr/>
+      </p:nvGrpSpPr>
+      <p:grpSpPr>
+        <a:xfrm>
+          <a:off x="0" y="0"/>
+          <a:ext cx="0" cy="0"/>
+          <a:chOff x="0" y="0"/>
+          <a:chExt cx="0" cy="0"/>
+        </a:xfrm>
+      </p:grpSpPr>
+      <p:sp>
+        <p:nvSpPr>
+          <p:cNvPr id="2" name="Title 1">
+            <a:extLst>
+              <a:ext uri="{FF2B5EF4-FFF2-40B4-BE49-F238E27FC236}">
                 <a16:creationId xmlns:a16="http://schemas.microsoft.com/office/drawing/2014/main" id="{1692DAC3-686C-C5A9-EB94-7315ADF45855}"/>
               </a:ext>
             </a:extLst>
@@ -7327,7 +7417,7 @@
 </p:sld>
 </file>
 
-<file path=ppt/slides/slide15.xml><?xml version="1.0" encoding="utf-8"?>
+<file path=ppt/slides/slide16.xml><?xml version="1.0" encoding="utf-8"?>
 <p:sld xmlns:a="http://schemas.openxmlformats.org/drawingml/2006/main" xmlns:r="http://schemas.openxmlformats.org/officeDocument/2006/relationships" xmlns:p="http://schemas.openxmlformats.org/presentationml/2006/main">
   <p:cSld>
     <p:spTree>
@@ -7486,52 +7576,93 @@
             </a:r>
           </a:p>
           <a:p>
+            <a:pPr marL="0" indent="0">
+              <a:buNone/>
+            </a:pPr>
+            <a:r>
+              <a:rPr lang="en-US" sz="1600" dirty="0">
+                <a:solidFill>
+                  <a:schemeClr val="bg2">
+                    <a:lumMod val="50000"/>
+                  </a:schemeClr>
+                </a:solidFill>
+                <a:highlight>
+                  <a:srgbClr val="00FF00"/>
+                </a:highlight>
+              </a:rPr>
+              <a:t>  The main objectives of this project are</a:t>
+            </a:r>
             <a:r>
               <a:rPr lang="en-US" sz="1600" dirty="0">
                 <a:highlight>
                   <a:srgbClr val="00FF00"/>
                 </a:highlight>
               </a:rPr>
-              <a:t>The main objectives of this project are:</a:t>
-            </a:r>
-          </a:p>
-          <a:p>
+              <a:t>:</a:t>
+            </a:r>
+          </a:p>
+          <a:p>
+            <a:pPr marL="0" indent="0">
+              <a:buNone/>
+            </a:pPr>
             <a:r>
               <a:rPr lang="en-US" sz="1600" dirty="0"/>
-              <a:t>Build a real-time streaming data pipeline using Amazon Kinesis.</a:t>
-            </a:r>
-          </a:p>
-          <a:p>
+              <a:t>              1.  Build a real-time streaming data pipeline using Amazon Kinesis.</a:t>
+            </a:r>
+          </a:p>
+          <a:p>
+            <a:pPr marL="0" indent="0">
+              <a:buNone/>
+            </a:pPr>
             <a:r>
               <a:rPr lang="en-US" sz="1600" dirty="0"/>
-              <a:t> Implement Medallion Architecture (Bronze, Silver, Gold layers) in Databricks. </a:t>
-            </a:r>
-          </a:p>
-          <a:p>
+              <a:t>              2.  Implement Medallion Architecture (Bronze, Silver, Gold layers) in Databricks. </a:t>
+            </a:r>
+          </a:p>
+          <a:p>
+            <a:pPr marL="0" indent="0">
+              <a:buNone/>
+            </a:pPr>
             <a:r>
               <a:rPr lang="en-US" sz="1600" dirty="0"/>
-              <a:t>Clean and transform raw IoT sensor data.</a:t>
-            </a:r>
-          </a:p>
-          <a:p>
+              <a:t>             3.  Clean and transform raw IoT sensor data. </a:t>
+            </a:r>
+          </a:p>
+          <a:p>
+            <a:pPr marL="0" indent="0">
+              <a:buNone/>
+            </a:pPr>
             <a:r>
               <a:rPr lang="en-US" sz="1600" dirty="0"/>
-              <a:t>Apply anomaly detection techniques using Z-score.</a:t>
-            </a:r>
-          </a:p>
-          <a:p>
+              <a:t>             4. Apply anomaly detection techniques using Z-score.</a:t>
+            </a:r>
+          </a:p>
+          <a:p>
+            <a:pPr marL="0" indent="0">
+              <a:buNone/>
+            </a:pPr>
             <a:r>
               <a:rPr lang="en-US" sz="1600" dirty="0"/>
-              <a:t> Provide real-time dashboards for monitoring sensor health. </a:t>
-            </a:r>
-          </a:p>
-          <a:p>
+              <a:t>             5. Provide real-time dashboards for monitoring sensor health.  </a:t>
+            </a:r>
+          </a:p>
+          <a:p>
+            <a:pPr marL="0" indent="0">
+              <a:buNone/>
+            </a:pPr>
             <a:r>
               <a:rPr lang="en-US" sz="1600" dirty="0"/>
-              <a:t>Trigger Slack alerts for critical anomalies.</a:t>
-            </a:r>
-          </a:p>
-          <a:p>
+              <a:t>             6.  Trigger Slack alerts for critical anomalies.</a:t>
+            </a:r>
+          </a:p>
+          <a:p>
+            <a:pPr marL="0" indent="0">
+              <a:buNone/>
+            </a:pPr>
+            <a:r>
+              <a:rPr lang="en-US" sz="1600"/>
+              <a:t>             7. </a:t>
+            </a:r>
             <a:r>
               <a:rPr lang="en-US" sz="1600" dirty="0"/>
               <a:t>This enables proactive monitoring and predictive maintenance.</a:t>
@@ -7613,12 +7744,102 @@
           </a:p>
         </p:txBody>
       </p:sp>
+      <p:sp>
+        <p:nvSpPr>
+          <p:cNvPr id="2" name="AutoShape 2">
+            <a:extLst>
+              <a:ext uri="{FF2B5EF4-FFF2-40B4-BE49-F238E27FC236}">
+                <a16:creationId xmlns:a16="http://schemas.microsoft.com/office/drawing/2014/main" id="{AD8FAF8B-54D6-FBF4-ED96-96FEF877B2BB}"/>
+              </a:ext>
+            </a:extLst>
+          </p:cNvPr>
+          <p:cNvSpPr>
+            <a:spLocks noChangeAspect="1" noChangeArrowheads="1"/>
+          </p:cNvSpPr>
+          <p:nvPr/>
+        </p:nvSpPr>
+        <p:spPr bwMode="auto">
+          <a:xfrm>
+            <a:off x="5943600" y="3276600"/>
+            <a:ext cx="304800" cy="304800"/>
+          </a:xfrm>
+          <a:prstGeom prst="rect">
+            <a:avLst/>
+          </a:prstGeom>
+          <a:noFill/>
+          <a:extLst>
+            <a:ext uri="{909E8E84-426E-40DD-AFC4-6F175D3DCCD1}">
+              <a14:hiddenFill xmlns:a14="http://schemas.microsoft.com/office/drawing/2010/main">
+                <a:solidFill>
+                  <a:srgbClr val="FFFFFF"/>
+                </a:solidFill>
+              </a14:hiddenFill>
+            </a:ext>
+          </a:extLst>
+        </p:spPr>
+        <p:txBody>
+          <a:bodyPr vert="horz" wrap="square" lIns="91440" tIns="45720" rIns="91440" bIns="45720" numCol="1" anchor="t" anchorCtr="0" compatLnSpc="1">
+            <a:prstTxWarp prst="textNoShape">
+              <a:avLst/>
+            </a:prstTxWarp>
+          </a:bodyPr>
+          <a:lstStyle/>
+          <a:p>
+            <a:endParaRPr lang="en-IN"/>
+          </a:p>
+        </p:txBody>
+      </p:sp>
+      <p:sp>
+        <p:nvSpPr>
+          <p:cNvPr id="4" name="AutoShape 4">
+            <a:extLst>
+              <a:ext uri="{FF2B5EF4-FFF2-40B4-BE49-F238E27FC236}">
+                <a16:creationId xmlns:a16="http://schemas.microsoft.com/office/drawing/2014/main" id="{4BC18D2F-C9E9-6ED7-D9DE-49EC33825D60}"/>
+              </a:ext>
+            </a:extLst>
+          </p:cNvPr>
+          <p:cNvSpPr>
+            <a:spLocks noChangeAspect="1" noChangeArrowheads="1"/>
+          </p:cNvSpPr>
+          <p:nvPr/>
+        </p:nvSpPr>
+        <p:spPr bwMode="auto">
+          <a:xfrm>
+            <a:off x="6096000" y="-163286"/>
+            <a:ext cx="3897086" cy="3897086"/>
+          </a:xfrm>
+          <a:prstGeom prst="rect">
+            <a:avLst/>
+          </a:prstGeom>
+          <a:noFill/>
+          <a:extLst>
+            <a:ext uri="{909E8E84-426E-40DD-AFC4-6F175D3DCCD1}">
+              <a14:hiddenFill xmlns:a14="http://schemas.microsoft.com/office/drawing/2010/main">
+                <a:solidFill>
+                  <a:srgbClr val="FFFFFF"/>
+                </a:solidFill>
+              </a14:hiddenFill>
+            </a:ext>
+          </a:extLst>
+        </p:spPr>
+        <p:txBody>
+          <a:bodyPr vert="horz" wrap="square" lIns="91440" tIns="45720" rIns="91440" bIns="45720" numCol="1" anchor="t" anchorCtr="0" compatLnSpc="1">
+            <a:prstTxWarp prst="textNoShape">
+              <a:avLst/>
+            </a:prstTxWarp>
+          </a:bodyPr>
+          <a:lstStyle/>
+          <a:p>
+            <a:endParaRPr lang="en-IN"/>
+          </a:p>
+        </p:txBody>
+      </p:sp>
       <p:pic>
         <p:nvPicPr>
-          <p:cNvPr id="5" name="Picture 4">
+          <p:cNvPr id="7" name="Picture 6">
             <a:extLst>
               <a:ext uri="{FF2B5EF4-FFF2-40B4-BE49-F238E27FC236}">
-                <a16:creationId xmlns:a16="http://schemas.microsoft.com/office/drawing/2014/main" id="{6AA5269F-B987-EFC7-73FE-70D6706E39C3}"/>
+                <a16:creationId xmlns:a16="http://schemas.microsoft.com/office/drawing/2014/main" id="{A8693412-7CAA-217A-3BD4-396AD21F8028}"/>
               </a:ext>
             </a:extLst>
           </p:cNvPr>
@@ -7628,15 +7849,21 @@
           <p:nvPr/>
         </p:nvPicPr>
         <p:blipFill>
-          <a:blip r:embed="rId2"/>
+          <a:blip r:embed="rId2">
+            <a:extLst>
+              <a:ext uri="{28A0092B-C50C-407E-A947-70E740481C1C}">
+                <a14:useLocalDpi xmlns:a14="http://schemas.microsoft.com/office/drawing/2010/main" val="0"/>
+              </a:ext>
+            </a:extLst>
+          </a:blip>
           <a:stretch>
             <a:fillRect/>
           </a:stretch>
         </p:blipFill>
         <p:spPr>
           <a:xfrm>
-            <a:off x="163285" y="722387"/>
-            <a:ext cx="11604172" cy="5413225"/>
+            <a:off x="952500" y="0"/>
+            <a:ext cx="10287000" cy="6858000"/>
           </a:xfrm>
           <a:prstGeom prst="rect">
             <a:avLst/>
@@ -8579,7 +8806,7 @@
           <p:cNvPr id="2" name="Title 1">
             <a:extLst>
               <a:ext uri="{FF2B5EF4-FFF2-40B4-BE49-F238E27FC236}">
-                <a16:creationId xmlns:a16="http://schemas.microsoft.com/office/drawing/2014/main" id="{B128F91E-CAB3-B25F-B868-6337E56072CD}"/>
+                <a16:creationId xmlns:a16="http://schemas.microsoft.com/office/drawing/2014/main" id="{BD1337CC-5219-A396-ED9C-A81390FE8325}"/>
               </a:ext>
             </a:extLst>
           </p:cNvPr>
@@ -8590,94 +8817,64 @@
             <p:ph type="title"/>
           </p:nvPr>
         </p:nvSpPr>
-        <p:spPr/>
+        <p:spPr>
+          <a:xfrm>
+            <a:off x="711426" y="80024"/>
+            <a:ext cx="9404723" cy="1400530"/>
+          </a:xfrm>
+        </p:spPr>
         <p:txBody>
           <a:bodyPr/>
           <a:lstStyle/>
           <a:p>
             <a:r>
               <a:rPr lang="en-US" dirty="0"/>
-              <a:t>        Pipeline Orchestration</a:t>
-            </a:r>
-          </a:p>
-        </p:txBody>
-      </p:sp>
-      <p:sp>
-        <p:nvSpPr>
-          <p:cNvPr id="3" name="Content Placeholder 2">
+              <a:t>                     </a:t>
+            </a:r>
+            <a:r>
+              <a:rPr lang="en-US" dirty="0" err="1"/>
+              <a:t>DashBoards</a:t>
+            </a:r>
+            <a:endParaRPr lang="en-US" dirty="0"/>
+          </a:p>
+        </p:txBody>
+      </p:sp>
+      <p:pic>
+        <p:nvPicPr>
+          <p:cNvPr id="10" name="Content Placeholder 9">
             <a:extLst>
               <a:ext uri="{FF2B5EF4-FFF2-40B4-BE49-F238E27FC236}">
-                <a16:creationId xmlns:a16="http://schemas.microsoft.com/office/drawing/2014/main" id="{EA46F803-6CAB-2315-3E2D-54A88F888775}"/>
+                <a16:creationId xmlns:a16="http://schemas.microsoft.com/office/drawing/2014/main" id="{D513CFBA-B1B5-F834-9E12-A7B479B03F42}"/>
               </a:ext>
             </a:extLst>
           </p:cNvPr>
-          <p:cNvSpPr>
-            <a:spLocks noGrp="1"/>
-          </p:cNvSpPr>
+          <p:cNvPicPr>
+            <a:picLocks noGrp="1" noChangeAspect="1"/>
+          </p:cNvPicPr>
           <p:nvPr>
             <p:ph idx="1"/>
           </p:nvPr>
-        </p:nvSpPr>
-        <p:spPr/>
-        <p:txBody>
-          <a:bodyPr>
-            <a:normAutofit fontScale="92500" lnSpcReduction="10000"/>
-          </a:bodyPr>
-          <a:lstStyle/>
-          <a:p>
-            <a:r>
-              <a:rPr lang="en-US" dirty="0"/>
-              <a:t>Designed an automated data pipeline workflow to manage the end-to-end IoT data processing.</a:t>
-            </a:r>
-          </a:p>
-          <a:p>
-            <a:r>
-              <a:rPr lang="en-US" dirty="0"/>
-              <a:t>Used Apache Airflow DAG to orchestrate different pipeline stages. </a:t>
-            </a:r>
-          </a:p>
-          <a:p>
-            <a:r>
-              <a:rPr lang="en-US" dirty="0"/>
-              <a:t>Scheduled pipeline execution to run automatically at defined intervals.</a:t>
-            </a:r>
-          </a:p>
-          <a:p>
-            <a:r>
-              <a:rPr lang="en-US" dirty="0"/>
-              <a:t> Triggered Databricks notebooks for Bronze, Silver, and Gold layer processing.</a:t>
-            </a:r>
-          </a:p>
-          <a:p>
-            <a:r>
-              <a:rPr lang="en-US" dirty="0"/>
-              <a:t>Managed task dependencies to ensure proper execution order of the pipeline</a:t>
-            </a:r>
-          </a:p>
-          <a:p>
-            <a:r>
-              <a:rPr lang="en-US" dirty="0"/>
-              <a:t> Implemented monitoring of pipeline runs and task execution status.</a:t>
-            </a:r>
-          </a:p>
-          <a:p>
-            <a:r>
-              <a:rPr lang="en-US" dirty="0"/>
-              <a:t> Integrated Slack notifications for pipeline alerts and anomaly events.</a:t>
-            </a:r>
-          </a:p>
-          <a:p>
-            <a:r>
-              <a:rPr lang="en-US" dirty="0"/>
-              <a:t> Enabled reliable and scalable workflow automation for continuous data processing.</a:t>
-            </a:r>
-          </a:p>
-        </p:txBody>
-      </p:sp>
+        </p:nvPicPr>
+        <p:blipFill>
+          <a:blip r:embed="rId2"/>
+          <a:stretch>
+            <a:fillRect/>
+          </a:stretch>
+        </p:blipFill>
+        <p:spPr>
+          <a:xfrm>
+            <a:off x="-76200" y="707571"/>
+            <a:ext cx="12377057" cy="6150429"/>
+          </a:xfrm>
+          <a:prstGeom prst="rect">
+            <a:avLst/>
+          </a:prstGeom>
+        </p:spPr>
+      </p:pic>
     </p:spTree>
     <p:extLst>
       <p:ext uri="{BB962C8B-B14F-4D97-AF65-F5344CB8AC3E}">
-        <p14:creationId xmlns:p14="http://schemas.microsoft.com/office/powerpoint/2010/main" val="791712982"/>
+        <p14:creationId xmlns:p14="http://schemas.microsoft.com/office/powerpoint/2010/main" val="1242523886"/>
       </p:ext>
     </p:extLst>
   </p:cSld>

--- a/Iot sensor anomoly detetction.pptx
+++ b/Iot sensor anomoly detetction.pptx
@@ -5,7 +5,7 @@
     <p:sldMasterId id="2147483798" r:id="rId1"/>
   </p:sldMasterIdLst>
   <p:notesMasterIdLst>
-    <p:notesMasterId r:id="rId18"/>
+    <p:notesMasterId r:id="rId19"/>
   </p:notesMasterIdLst>
   <p:sldIdLst>
     <p:sldId id="264" r:id="rId2"/>
@@ -21,9 +21,10 @@
     <p:sldId id="276" r:id="rId12"/>
     <p:sldId id="269" r:id="rId13"/>
     <p:sldId id="270" r:id="rId14"/>
-    <p:sldId id="273" r:id="rId15"/>
-    <p:sldId id="274" r:id="rId16"/>
-    <p:sldId id="275" r:id="rId17"/>
+    <p:sldId id="277" r:id="rId15"/>
+    <p:sldId id="273" r:id="rId16"/>
+    <p:sldId id="274" r:id="rId17"/>
+    <p:sldId id="275" r:id="rId18"/>
   </p:sldIdLst>
   <p:sldSz cx="12192000" cy="6858000"/>
   <p:notesSz cx="6858000" cy="9144000"/>
@@ -133,7 +134,7 @@
 <file path=ppt/revisionInfo.xml><?xml version="1.0" encoding="utf-8"?>
 <p1510:revInfo xmlns:a="http://schemas.openxmlformats.org/drawingml/2006/main" xmlns:r="http://schemas.openxmlformats.org/officeDocument/2006/relationships" xmlns:p1510="http://schemas.microsoft.com/office/powerpoint/2015/10/main">
   <p1510:revLst>
-    <p1510:client id="{62F1994D-C734-4C06-B0E1-0AECC1958F22}" v="4" dt="2026-03-19T09:23:44.038"/>
+    <p1510:client id="{AEE68050-78E2-4E9C-A98E-1354618D8982}" v="1" dt="2026-03-19T16:41:03.863"/>
   </p1510:revLst>
 </p1510:revInfo>
 </file>
@@ -142,264 +143,117 @@
 <pc:chgInfo xmlns:a="http://schemas.openxmlformats.org/drawingml/2006/main" xmlns:r="http://schemas.openxmlformats.org/officeDocument/2006/relationships" xmlns:ac="http://schemas.microsoft.com/office/drawing/2013/main/command" xmlns:pc="http://schemas.microsoft.com/office/powerpoint/2013/main/command">
   <pc:docChgLst>
     <pc:chgData name="Bellamkonda Satya sai venkateswarlu" userId="a00ae827de090eec" providerId="LiveId" clId="{2E0DFA91-85F5-4C63-AE93-6F1657668455}"/>
-    <pc:docChg chg="undo custSel addSld delSld modSld sldOrd">
-      <pc:chgData name="Bellamkonda Satya sai venkateswarlu" userId="a00ae827de090eec" providerId="LiveId" clId="{2E0DFA91-85F5-4C63-AE93-6F1657668455}" dt="2026-03-19T10:05:26.921" v="314" actId="14100"/>
+    <pc:docChg chg="undo custSel addSld modSld">
+      <pc:chgData name="Bellamkonda Satya sai venkateswarlu" userId="a00ae827de090eec" providerId="LiveId" clId="{2E0DFA91-85F5-4C63-AE93-6F1657668455}" dt="2026-03-19T16:42:55.223" v="99" actId="1076"/>
       <pc:docMkLst>
         <pc:docMk/>
       </pc:docMkLst>
-      <pc:sldChg chg="modSp del mod">
-        <pc:chgData name="Bellamkonda Satya sai venkateswarlu" userId="a00ae827de090eec" providerId="LiveId" clId="{2E0DFA91-85F5-4C63-AE93-6F1657668455}" dt="2026-03-18T09:18:46.163" v="53" actId="2696"/>
+      <pc:sldChg chg="modSp mod">
+        <pc:chgData name="Bellamkonda Satya sai venkateswarlu" userId="a00ae827de090eec" providerId="LiveId" clId="{2E0DFA91-85F5-4C63-AE93-6F1657668455}" dt="2026-03-19T16:41:36.162" v="90" actId="20577"/>
         <pc:sldMkLst>
           <pc:docMk/>
-          <pc:sldMk cId="3564843010" sldId="256"/>
+          <pc:sldMk cId="791712982" sldId="269"/>
         </pc:sldMkLst>
         <pc:spChg chg="mod">
-          <ac:chgData name="Bellamkonda Satya sai venkateswarlu" userId="a00ae827de090eec" providerId="LiveId" clId="{2E0DFA91-85F5-4C63-AE93-6F1657668455}" dt="2026-03-18T05:27:16.671" v="47" actId="20577"/>
+          <ac:chgData name="Bellamkonda Satya sai venkateswarlu" userId="a00ae827de090eec" providerId="LiveId" clId="{2E0DFA91-85F5-4C63-AE93-6F1657668455}" dt="2026-03-19T16:41:36.162" v="90" actId="20577"/>
           <ac:spMkLst>
             <pc:docMk/>
-            <pc:sldMk cId="3564843010" sldId="256"/>
-            <ac:spMk id="3" creationId="{FCA64AC6-8339-3E7B-B108-5AF3AB68249A}"/>
+            <pc:sldMk cId="791712982" sldId="269"/>
+            <ac:spMk id="2" creationId="{B128F91E-CAB3-B25F-B868-6337E56072CD}"/>
           </ac:spMkLst>
         </pc:spChg>
       </pc:sldChg>
-      <pc:sldChg chg="del">
-        <pc:chgData name="Bellamkonda Satya sai venkateswarlu" userId="a00ae827de090eec" providerId="LiveId" clId="{2E0DFA91-85F5-4C63-AE93-6F1657668455}" dt="2026-03-18T04:31:35.644" v="0" actId="2696"/>
+      <pc:sldChg chg="addSp delSp modSp mod modClrScheme chgLayout">
+        <pc:chgData name="Bellamkonda Satya sai venkateswarlu" userId="a00ae827de090eec" providerId="LiveId" clId="{2E0DFA91-85F5-4C63-AE93-6F1657668455}" dt="2026-03-19T16:39:31.185" v="2" actId="700"/>
         <pc:sldMkLst>
           <pc:docMk/>
-          <pc:sldMk cId="4153071702" sldId="258"/>
+          <pc:sldMk cId="2437225187" sldId="270"/>
         </pc:sldMkLst>
-      </pc:sldChg>
-      <pc:sldChg chg="modSp mod">
-        <pc:chgData name="Bellamkonda Satya sai venkateswarlu" userId="a00ae827de090eec" providerId="LiveId" clId="{2E0DFA91-85F5-4C63-AE93-6F1657668455}" dt="2026-03-19T09:33:16.935" v="289" actId="20577"/>
-        <pc:sldMkLst>
-          <pc:docMk/>
-          <pc:sldMk cId="472364283" sldId="259"/>
-        </pc:sldMkLst>
-        <pc:spChg chg="mod">
-          <ac:chgData name="Bellamkonda Satya sai venkateswarlu" userId="a00ae827de090eec" providerId="LiveId" clId="{2E0DFA91-85F5-4C63-AE93-6F1657668455}" dt="2026-03-18T05:21:39.810" v="41" actId="20577"/>
+        <pc:spChg chg="mod ord">
+          <ac:chgData name="Bellamkonda Satya sai venkateswarlu" userId="a00ae827de090eec" providerId="LiveId" clId="{2E0DFA91-85F5-4C63-AE93-6F1657668455}" dt="2026-03-19T16:39:31.185" v="2" actId="700"/>
           <ac:spMkLst>
             <pc:docMk/>
-            <pc:sldMk cId="472364283" sldId="259"/>
-            <ac:spMk id="2" creationId="{0B1071B0-16C9-16AB-CCB5-594272D30303}"/>
+            <pc:sldMk cId="2437225187" sldId="270"/>
+            <ac:spMk id="2" creationId="{B70B12F5-308B-AA10-CB52-9325D6F6ED3B}"/>
           </ac:spMkLst>
         </pc:spChg>
-        <pc:spChg chg="mod">
-          <ac:chgData name="Bellamkonda Satya sai venkateswarlu" userId="a00ae827de090eec" providerId="LiveId" clId="{2E0DFA91-85F5-4C63-AE93-6F1657668455}" dt="2026-03-19T09:33:16.935" v="289" actId="20577"/>
+        <pc:spChg chg="mod ord">
+          <ac:chgData name="Bellamkonda Satya sai venkateswarlu" userId="a00ae827de090eec" providerId="LiveId" clId="{2E0DFA91-85F5-4C63-AE93-6F1657668455}" dt="2026-03-19T16:39:31.185" v="2" actId="700"/>
           <ac:spMkLst>
             <pc:docMk/>
-            <pc:sldMk cId="472364283" sldId="259"/>
-            <ac:spMk id="3" creationId="{0443A9F8-5EC9-E387-8113-24613FC42321}"/>
+            <pc:sldMk cId="2437225187" sldId="270"/>
+            <ac:spMk id="3" creationId="{2F123050-61ED-80DA-2803-6291D24F285C}"/>
+          </ac:spMkLst>
+        </pc:spChg>
+        <pc:spChg chg="add del mod ord">
+          <ac:chgData name="Bellamkonda Satya sai venkateswarlu" userId="a00ae827de090eec" providerId="LiveId" clId="{2E0DFA91-85F5-4C63-AE93-6F1657668455}" dt="2026-03-19T16:39:31.185" v="2" actId="700"/>
+          <ac:spMkLst>
+            <pc:docMk/>
+            <pc:sldMk cId="2437225187" sldId="270"/>
+            <ac:spMk id="4" creationId="{2935186A-2FB2-11D9-ADC2-6D061FC6242E}"/>
           </ac:spMkLst>
         </pc:spChg>
       </pc:sldChg>
-      <pc:sldChg chg="addSp delSp modSp mod">
-        <pc:chgData name="Bellamkonda Satya sai venkateswarlu" userId="a00ae827de090eec" providerId="LiveId" clId="{2E0DFA91-85F5-4C63-AE93-6F1657668455}" dt="2026-03-19T09:24:12.231" v="66" actId="931"/>
+      <pc:sldChg chg="addSp delSp modSp new mod modClrScheme chgLayout">
+        <pc:chgData name="Bellamkonda Satya sai venkateswarlu" userId="a00ae827de090eec" providerId="LiveId" clId="{2E0DFA91-85F5-4C63-AE93-6F1657668455}" dt="2026-03-19T16:42:55.223" v="99" actId="1076"/>
         <pc:sldMkLst>
           <pc:docMk/>
-          <pc:sldMk cId="3328679500" sldId="260"/>
+          <pc:sldMk cId="2912946641" sldId="277"/>
         </pc:sldMkLst>
-        <pc:spChg chg="add">
-          <ac:chgData name="Bellamkonda Satya sai venkateswarlu" userId="a00ae827de090eec" providerId="LiveId" clId="{2E0DFA91-85F5-4C63-AE93-6F1657668455}" dt="2026-03-19T09:23:35.312" v="63"/>
+        <pc:spChg chg="del mod ord">
+          <ac:chgData name="Bellamkonda Satya sai venkateswarlu" userId="a00ae827de090eec" providerId="LiveId" clId="{2E0DFA91-85F5-4C63-AE93-6F1657668455}" dt="2026-03-19T16:39:37.630" v="4" actId="700"/>
           <ac:spMkLst>
             <pc:docMk/>
-            <pc:sldMk cId="3328679500" sldId="260"/>
-            <ac:spMk id="2" creationId="{AD8FAF8B-54D6-FBF4-ED96-96FEF877B2BB}"/>
+            <pc:sldMk cId="2912946641" sldId="277"/>
+            <ac:spMk id="2" creationId="{68472C16-D23A-A688-1136-992A765C5A70}"/>
           </ac:spMkLst>
         </pc:spChg>
-        <pc:spChg chg="add mod">
-          <ac:chgData name="Bellamkonda Satya sai venkateswarlu" userId="a00ae827de090eec" providerId="LiveId" clId="{2E0DFA91-85F5-4C63-AE93-6F1657668455}" dt="2026-03-19T09:23:44.037" v="65" actId="14100"/>
+        <pc:spChg chg="del mod ord">
+          <ac:chgData name="Bellamkonda Satya sai venkateswarlu" userId="a00ae827de090eec" providerId="LiveId" clId="{2E0DFA91-85F5-4C63-AE93-6F1657668455}" dt="2026-03-19T16:39:37.630" v="4" actId="700"/>
           <ac:spMkLst>
             <pc:docMk/>
-            <pc:sldMk cId="3328679500" sldId="260"/>
-            <ac:spMk id="4" creationId="{4BC18D2F-C9E9-6ED7-D9DE-49EC33825D60}"/>
+            <pc:sldMk cId="2912946641" sldId="277"/>
+            <ac:spMk id="3" creationId="{F31E8617-7C89-B8B5-D86A-05FEF7565A82}"/>
           </ac:spMkLst>
         </pc:spChg>
-        <pc:picChg chg="del">
-          <ac:chgData name="Bellamkonda Satya sai venkateswarlu" userId="a00ae827de090eec" providerId="LiveId" clId="{2E0DFA91-85F5-4C63-AE93-6F1657668455}" dt="2026-03-19T09:23:34.359" v="62" actId="478"/>
+        <pc:spChg chg="add mod ord">
+          <ac:chgData name="Bellamkonda Satya sai venkateswarlu" userId="a00ae827de090eec" providerId="LiveId" clId="{2E0DFA91-85F5-4C63-AE93-6F1657668455}" dt="2026-03-19T16:39:56.250" v="62" actId="20577"/>
+          <ac:spMkLst>
+            <pc:docMk/>
+            <pc:sldMk cId="2912946641" sldId="277"/>
+            <ac:spMk id="4" creationId="{D64B6846-CC01-B938-535B-E47EAFF12D7B}"/>
+          </ac:spMkLst>
+        </pc:spChg>
+        <pc:spChg chg="add del mod ord">
+          <ac:chgData name="Bellamkonda Satya sai venkateswarlu" userId="a00ae827de090eec" providerId="LiveId" clId="{2E0DFA91-85F5-4C63-AE93-6F1657668455}" dt="2026-03-19T16:42:26.712" v="91" actId="931"/>
+          <ac:spMkLst>
+            <pc:docMk/>
+            <pc:sldMk cId="2912946641" sldId="277"/>
+            <ac:spMk id="5" creationId="{7BF0C562-A7C5-50D1-8D38-9324CC2C4FE2}"/>
+          </ac:spMkLst>
+        </pc:spChg>
+        <pc:spChg chg="add mod ord">
+          <ac:chgData name="Bellamkonda Satya sai venkateswarlu" userId="a00ae827de090eec" providerId="LiveId" clId="{2E0DFA91-85F5-4C63-AE93-6F1657668455}" dt="2026-03-19T16:41:17.516" v="66" actId="255"/>
+          <ac:spMkLst>
+            <pc:docMk/>
+            <pc:sldMk cId="2912946641" sldId="277"/>
+            <ac:spMk id="6" creationId="{2A787F23-E03B-503B-E005-C018809FB7EF}"/>
+          </ac:spMkLst>
+        </pc:spChg>
+        <pc:picChg chg="add mod ord">
+          <ac:chgData name="Bellamkonda Satya sai venkateswarlu" userId="a00ae827de090eec" providerId="LiveId" clId="{2E0DFA91-85F5-4C63-AE93-6F1657668455}" dt="2026-03-19T16:42:55.223" v="99" actId="1076"/>
           <ac:picMkLst>
             <pc:docMk/>
-            <pc:sldMk cId="3328679500" sldId="260"/>
-            <ac:picMk id="5" creationId="{6AA5269F-B987-EFC7-73FE-70D6706E39C3}"/>
+            <pc:sldMk cId="2912946641" sldId="277"/>
+            <ac:picMk id="8" creationId="{257ED88D-73C9-0A83-6C08-8E5FA810D84A}"/>
           </ac:picMkLst>
         </pc:picChg>
         <pc:picChg chg="add mod">
-          <ac:chgData name="Bellamkonda Satya sai venkateswarlu" userId="a00ae827de090eec" providerId="LiveId" clId="{2E0DFA91-85F5-4C63-AE93-6F1657668455}" dt="2026-03-19T09:24:12.231" v="66" actId="931"/>
+          <ac:chgData name="Bellamkonda Satya sai venkateswarlu" userId="a00ae827de090eec" providerId="LiveId" clId="{2E0DFA91-85F5-4C63-AE93-6F1657668455}" dt="2026-03-19T16:42:53.164" v="98" actId="14100"/>
           <ac:picMkLst>
             <pc:docMk/>
-            <pc:sldMk cId="3328679500" sldId="260"/>
-            <ac:picMk id="7" creationId="{A8693412-7CAA-217A-3BD4-396AD21F8028}"/>
-          </ac:picMkLst>
-        </pc:picChg>
-      </pc:sldChg>
-      <pc:sldChg chg="addSp delSp modSp mod">
-        <pc:chgData name="Bellamkonda Satya sai venkateswarlu" userId="a00ae827de090eec" providerId="LiveId" clId="{2E0DFA91-85F5-4C63-AE93-6F1657668455}" dt="2026-03-18T09:20:17.016" v="57" actId="14100"/>
-        <pc:sldMkLst>
-          <pc:docMk/>
-          <pc:sldMk cId="3518060995" sldId="264"/>
-        </pc:sldMkLst>
-        <pc:picChg chg="del mod">
-          <ac:chgData name="Bellamkonda Satya sai venkateswarlu" userId="a00ae827de090eec" providerId="LiveId" clId="{2E0DFA91-85F5-4C63-AE93-6F1657668455}" dt="2026-03-18T09:18:49.979" v="54" actId="478"/>
-          <ac:picMkLst>
-            <pc:docMk/>
-            <pc:sldMk cId="3518060995" sldId="264"/>
-            <ac:picMk id="3" creationId="{2B9020B7-0D31-862C-A2CA-ED41078DE8FD}"/>
-          </ac:picMkLst>
-        </pc:picChg>
-        <pc:picChg chg="add mod">
-          <ac:chgData name="Bellamkonda Satya sai venkateswarlu" userId="a00ae827de090eec" providerId="LiveId" clId="{2E0DFA91-85F5-4C63-AE93-6F1657668455}" dt="2026-03-18T09:20:17.016" v="57" actId="14100"/>
-          <ac:picMkLst>
-            <pc:docMk/>
-            <pc:sldMk cId="3518060995" sldId="264"/>
-            <ac:picMk id="4" creationId="{55397B3D-D28D-B7E7-1E6F-1E748F23BBF6}"/>
-          </ac:picMkLst>
-        </pc:picChg>
-      </pc:sldChg>
-      <pc:sldChg chg="addSp delSp modSp mod ord">
-        <pc:chgData name="Bellamkonda Satya sai venkateswarlu" userId="a00ae827de090eec" providerId="LiveId" clId="{2E0DFA91-85F5-4C63-AE93-6F1657668455}" dt="2026-03-19T10:03:53.124" v="300" actId="14100"/>
-        <pc:sldMkLst>
-          <pc:docMk/>
-          <pc:sldMk cId="1242523886" sldId="271"/>
-        </pc:sldMkLst>
-        <pc:spChg chg="add del mod">
-          <ac:chgData name="Bellamkonda Satya sai venkateswarlu" userId="a00ae827de090eec" providerId="LiveId" clId="{2E0DFA91-85F5-4C63-AE93-6F1657668455}" dt="2026-03-19T10:02:37.136" v="294" actId="931"/>
-          <ac:spMkLst>
-            <pc:docMk/>
-            <pc:sldMk cId="1242523886" sldId="271"/>
-            <ac:spMk id="4" creationId="{7EB37F2A-C9AD-7119-FC21-FEA4E1E4960C}"/>
-          </ac:spMkLst>
-        </pc:spChg>
-        <pc:spChg chg="add del mod">
-          <ac:chgData name="Bellamkonda Satya sai venkateswarlu" userId="a00ae827de090eec" providerId="LiveId" clId="{2E0DFA91-85F5-4C63-AE93-6F1657668455}" dt="2026-03-19T10:03:41.380" v="296" actId="22"/>
-          <ac:spMkLst>
-            <pc:docMk/>
-            <pc:sldMk cId="1242523886" sldId="271"/>
-            <ac:spMk id="8" creationId="{A789EF31-C524-1A33-62B2-BAD1766D6662}"/>
-          </ac:spMkLst>
-        </pc:spChg>
-        <pc:picChg chg="add del mod ord">
-          <ac:chgData name="Bellamkonda Satya sai venkateswarlu" userId="a00ae827de090eec" providerId="LiveId" clId="{2E0DFA91-85F5-4C63-AE93-6F1657668455}" dt="2026-03-19T10:02:40.049" v="295" actId="478"/>
-          <ac:picMkLst>
-            <pc:docMk/>
-            <pc:sldMk cId="1242523886" sldId="271"/>
-            <ac:picMk id="6" creationId="{4CC91E6A-BD5F-A2A8-C569-1C512B8DA654}"/>
-          </ac:picMkLst>
-        </pc:picChg>
-        <pc:picChg chg="add mod ord">
-          <ac:chgData name="Bellamkonda Satya sai venkateswarlu" userId="a00ae827de090eec" providerId="LiveId" clId="{2E0DFA91-85F5-4C63-AE93-6F1657668455}" dt="2026-03-19T10:03:53.124" v="300" actId="14100"/>
-          <ac:picMkLst>
-            <pc:docMk/>
-            <pc:sldMk cId="1242523886" sldId="271"/>
-            <ac:picMk id="10" creationId="{D513CFBA-B1B5-F834-9E12-A7B479B03F42}"/>
-          </ac:picMkLst>
-        </pc:picChg>
-        <pc:picChg chg="del">
-          <ac:chgData name="Bellamkonda Satya sai venkateswarlu" userId="a00ae827de090eec" providerId="LiveId" clId="{2E0DFA91-85F5-4C63-AE93-6F1657668455}" dt="2026-03-19T10:02:13.144" v="290" actId="478"/>
-          <ac:picMkLst>
-            <pc:docMk/>
-            <pc:sldMk cId="1242523886" sldId="271"/>
-            <ac:picMk id="13" creationId="{AAB83ED1-30D2-8534-A3D4-A0099D36A430}"/>
-          </ac:picMkLst>
-        </pc:picChg>
-        <pc:picChg chg="del">
-          <ac:chgData name="Bellamkonda Satya sai venkateswarlu" userId="a00ae827de090eec" providerId="LiveId" clId="{2E0DFA91-85F5-4C63-AE93-6F1657668455}" dt="2026-03-19T10:02:18.046" v="293" actId="478"/>
-          <ac:picMkLst>
-            <pc:docMk/>
-            <pc:sldMk cId="1242523886" sldId="271"/>
-            <ac:picMk id="15" creationId="{C32A20B8-909D-40BE-7677-2B79CCC41BFF}"/>
-          </ac:picMkLst>
-        </pc:picChg>
-        <pc:picChg chg="del">
-          <ac:chgData name="Bellamkonda Satya sai venkateswarlu" userId="a00ae827de090eec" providerId="LiveId" clId="{2E0DFA91-85F5-4C63-AE93-6F1657668455}" dt="2026-03-19T10:02:16.861" v="292" actId="478"/>
-          <ac:picMkLst>
-            <pc:docMk/>
-            <pc:sldMk cId="1242523886" sldId="271"/>
-            <ac:picMk id="17" creationId="{FFFBA5E4-6FF9-7F63-43D3-92A79FED5D5F}"/>
-          </ac:picMkLst>
-        </pc:picChg>
-        <pc:picChg chg="del">
-          <ac:chgData name="Bellamkonda Satya sai venkateswarlu" userId="a00ae827de090eec" providerId="LiveId" clId="{2E0DFA91-85F5-4C63-AE93-6F1657668455}" dt="2026-03-19T10:02:15.338" v="291" actId="478"/>
-          <ac:picMkLst>
-            <pc:docMk/>
-            <pc:sldMk cId="1242523886" sldId="271"/>
-            <ac:picMk id="19" creationId="{A351D55C-D23D-B812-7D26-A3DFBA90C3C5}"/>
-          </ac:picMkLst>
-        </pc:picChg>
-      </pc:sldChg>
-      <pc:sldChg chg="addSp delSp modSp mod ord">
-        <pc:chgData name="Bellamkonda Satya sai venkateswarlu" userId="a00ae827de090eec" providerId="LiveId" clId="{2E0DFA91-85F5-4C63-AE93-6F1657668455}" dt="2026-03-19T10:04:34.304" v="306" actId="14100"/>
-        <pc:sldMkLst>
-          <pc:docMk/>
-          <pc:sldMk cId="1846346669" sldId="272"/>
-        </pc:sldMkLst>
-        <pc:picChg chg="add mod">
-          <ac:chgData name="Bellamkonda Satya sai venkateswarlu" userId="a00ae827de090eec" providerId="LiveId" clId="{2E0DFA91-85F5-4C63-AE93-6F1657668455}" dt="2026-03-19T10:04:34.304" v="306" actId="14100"/>
-          <ac:picMkLst>
-            <pc:docMk/>
-            <pc:sldMk cId="1846346669" sldId="272"/>
-            <ac:picMk id="3" creationId="{5D7F6DA0-6DE5-C723-C6CD-463C4E2CD1E4}"/>
-          </ac:picMkLst>
-        </pc:picChg>
-        <pc:picChg chg="del">
-          <ac:chgData name="Bellamkonda Satya sai venkateswarlu" userId="a00ae827de090eec" providerId="LiveId" clId="{2E0DFA91-85F5-4C63-AE93-6F1657668455}" dt="2026-03-19T10:04:03" v="303" actId="478"/>
-          <ac:picMkLst>
-            <pc:docMk/>
-            <pc:sldMk cId="1846346669" sldId="272"/>
-            <ac:picMk id="5" creationId="{4299CA50-3F12-C495-5270-0FD32627CB29}"/>
-          </ac:picMkLst>
-        </pc:picChg>
-        <pc:picChg chg="del">
-          <ac:chgData name="Bellamkonda Satya sai venkateswarlu" userId="a00ae827de090eec" providerId="LiveId" clId="{2E0DFA91-85F5-4C63-AE93-6F1657668455}" dt="2026-03-19T10:04:01.944" v="302" actId="478"/>
-          <ac:picMkLst>
-            <pc:docMk/>
-            <pc:sldMk cId="1846346669" sldId="272"/>
-            <ac:picMk id="9" creationId="{698C33D2-F6FA-7B8A-E17C-09686A68EE78}"/>
-          </ac:picMkLst>
-        </pc:picChg>
-        <pc:picChg chg="del">
-          <ac:chgData name="Bellamkonda Satya sai venkateswarlu" userId="a00ae827de090eec" providerId="LiveId" clId="{2E0DFA91-85F5-4C63-AE93-6F1657668455}" dt="2026-03-19T10:04:00.692" v="301" actId="478"/>
-          <ac:picMkLst>
-            <pc:docMk/>
-            <pc:sldMk cId="1846346669" sldId="272"/>
-            <ac:picMk id="11" creationId="{8060230C-7669-E6A5-DA8A-5D4077AABD9D}"/>
-          </ac:picMkLst>
-        </pc:picChg>
-      </pc:sldChg>
-      <pc:sldChg chg="addSp delSp modSp new mod">
-        <pc:chgData name="Bellamkonda Satya sai venkateswarlu" userId="a00ae827de090eec" providerId="LiveId" clId="{2E0DFA91-85F5-4C63-AE93-6F1657668455}" dt="2026-03-19T10:05:26.921" v="314" actId="14100"/>
-        <pc:sldMkLst>
-          <pc:docMk/>
-          <pc:sldMk cId="942085794" sldId="276"/>
-        </pc:sldMkLst>
-        <pc:spChg chg="del">
-          <ac:chgData name="Bellamkonda Satya sai venkateswarlu" userId="a00ae827de090eec" providerId="LiveId" clId="{2E0DFA91-85F5-4C63-AE93-6F1657668455}" dt="2026-03-19T10:05:15.557" v="308" actId="478"/>
-          <ac:spMkLst>
-            <pc:docMk/>
-            <pc:sldMk cId="942085794" sldId="276"/>
-            <ac:spMk id="2" creationId="{30A73E16-8685-3D24-602A-45316559F53E}"/>
-          </ac:spMkLst>
-        </pc:spChg>
-        <pc:spChg chg="add del">
-          <ac:chgData name="Bellamkonda Satya sai venkateswarlu" userId="a00ae827de090eec" providerId="LiveId" clId="{2E0DFA91-85F5-4C63-AE93-6F1657668455}" dt="2026-03-19T10:05:21.224" v="311" actId="478"/>
-          <ac:spMkLst>
-            <pc:docMk/>
-            <pc:sldMk cId="942085794" sldId="276"/>
-            <ac:spMk id="3" creationId="{F87E0594-DBE7-0453-FBAA-703505D2150E}"/>
-          </ac:spMkLst>
-        </pc:spChg>
-        <pc:picChg chg="add del mod ord">
-          <ac:chgData name="Bellamkonda Satya sai venkateswarlu" userId="a00ae827de090eec" providerId="LiveId" clId="{2E0DFA91-85F5-4C63-AE93-6F1657668455}" dt="2026-03-19T10:05:19.640" v="310" actId="22"/>
-          <ac:picMkLst>
-            <pc:docMk/>
-            <pc:sldMk cId="942085794" sldId="276"/>
-            <ac:picMk id="5" creationId="{367821F0-7463-959F-C54A-552C33F453A0}"/>
-          </ac:picMkLst>
-        </pc:picChg>
-        <pc:picChg chg="add mod">
-          <ac:chgData name="Bellamkonda Satya sai venkateswarlu" userId="a00ae827de090eec" providerId="LiveId" clId="{2E0DFA91-85F5-4C63-AE93-6F1657668455}" dt="2026-03-19T10:05:26.921" v="314" actId="14100"/>
-          <ac:picMkLst>
-            <pc:docMk/>
-            <pc:sldMk cId="942085794" sldId="276"/>
-            <ac:picMk id="7" creationId="{79BB4D6A-BCA5-5D43-B922-4FBD417D850D}"/>
+            <pc:sldMk cId="2912946641" sldId="277"/>
+            <ac:picMk id="10" creationId="{0E34E7F7-8A61-E7E9-1700-A669602E77E6}"/>
           </ac:picMkLst>
         </pc:picChg>
       </pc:sldChg>
@@ -6943,7 +6797,15 @@
           <a:p>
             <a:r>
               <a:rPr lang="en-US" dirty="0"/>
-              <a:t>        Pipeline Orchestration</a:t>
+              <a:t>     </a:t>
+            </a:r>
+            <a:r>
+              <a:rPr lang="en-US" dirty="0" err="1"/>
+              <a:t>AirFlow</a:t>
+            </a:r>
+            <a:r>
+              <a:rPr lang="en-US" dirty="0"/>
+              <a:t>(Pipeline Orchestration)</a:t>
             </a:r>
           </a:p>
         </p:txBody>
@@ -7176,10 +7038,10 @@
       </p:grpSpPr>
       <p:sp>
         <p:nvSpPr>
-          <p:cNvPr id="2" name="Title 1">
+          <p:cNvPr id="4" name="Title 3">
             <a:extLst>
               <a:ext uri="{FF2B5EF4-FFF2-40B4-BE49-F238E27FC236}">
-                <a16:creationId xmlns:a16="http://schemas.microsoft.com/office/drawing/2014/main" id="{B8E31C44-94DB-0422-7744-376B46A1AD71}"/>
+                <a16:creationId xmlns:a16="http://schemas.microsoft.com/office/drawing/2014/main" id="{D64B6846-CC01-B938-535B-E47EAFF12D7B}"/>
               </a:ext>
             </a:extLst>
           </p:cNvPr>
@@ -7190,89 +7052,231 @@
             <p:ph type="title"/>
           </p:nvPr>
         </p:nvSpPr>
-        <p:spPr/>
+        <p:spPr>
+          <a:xfrm>
+            <a:off x="207896" y="109221"/>
+            <a:ext cx="6258217" cy="598350"/>
+          </a:xfrm>
+        </p:spPr>
         <p:txBody>
           <a:bodyPr/>
           <a:lstStyle/>
           <a:p>
             <a:r>
-              <a:rPr lang="en-US" dirty="0"/>
-              <a:t>                      Testing</a:t>
-            </a:r>
-          </a:p>
-        </p:txBody>
-      </p:sp>
-      <p:sp>
-        <p:nvSpPr>
-          <p:cNvPr id="3" name="Content Placeholder 2">
+              <a:rPr lang="en-IN" dirty="0"/>
+              <a:t>                                   Data Build Tools</a:t>
+            </a:r>
+          </a:p>
+        </p:txBody>
+      </p:sp>
+      <p:pic>
+        <p:nvPicPr>
+          <p:cNvPr id="8" name="Content Placeholder 7">
             <a:extLst>
               <a:ext uri="{FF2B5EF4-FFF2-40B4-BE49-F238E27FC236}">
-                <a16:creationId xmlns:a16="http://schemas.microsoft.com/office/drawing/2014/main" id="{E01DA643-2CB2-46E6-7ED6-6DD18D52A287}"/>
+                <a16:creationId xmlns:a16="http://schemas.microsoft.com/office/drawing/2014/main" id="{257ED88D-73C9-0A83-6C08-8E5FA810D84A}"/>
               </a:ext>
             </a:extLst>
           </p:cNvPr>
-          <p:cNvSpPr>
-            <a:spLocks noGrp="1"/>
-          </p:cNvSpPr>
+          <p:cNvPicPr>
+            <a:picLocks noGrp="1" noChangeAspect="1"/>
+          </p:cNvPicPr>
           <p:nvPr>
             <p:ph idx="1"/>
           </p:nvPr>
-        </p:nvSpPr>
+        </p:nvPicPr>
+        <p:blipFill>
+          <a:blip r:embed="rId2">
+            <a:extLst>
+              <a:ext uri="{28A0092B-C50C-407E-A947-70E740481C1C}">
+                <a14:useLocalDpi xmlns:a14="http://schemas.microsoft.com/office/drawing/2010/main" val="0"/>
+              </a:ext>
+            </a:extLst>
+          </a:blip>
+          <a:stretch>
+            <a:fillRect/>
+          </a:stretch>
+        </p:blipFill>
         <p:spPr>
           <a:xfrm>
-            <a:off x="1103312" y="2052918"/>
-            <a:ext cx="10065431" cy="4195481"/>
+            <a:off x="8017253" y="1419214"/>
+            <a:ext cx="4065889" cy="3826662"/>
+          </a:xfrm>
+          <a:prstGeom prst="rect">
+            <a:avLst/>
+          </a:prstGeom>
+        </p:spPr>
+      </p:pic>
+      <p:sp>
+        <p:nvSpPr>
+          <p:cNvPr id="6" name="Text Placeholder 5">
+            <a:extLst>
+              <a:ext uri="{FF2B5EF4-FFF2-40B4-BE49-F238E27FC236}">
+                <a16:creationId xmlns:a16="http://schemas.microsoft.com/office/drawing/2014/main" id="{2A787F23-E03B-503B-E005-C018809FB7EF}"/>
+              </a:ext>
+            </a:extLst>
+          </p:cNvPr>
+          <p:cNvSpPr>
+            <a:spLocks noGrp="1"/>
+          </p:cNvSpPr>
+          <p:nvPr>
+            <p:ph type="body" sz="half" idx="2"/>
+          </p:nvPr>
+        </p:nvSpPr>
+        <p:spPr>
+          <a:xfrm>
+            <a:off x="108858" y="1045029"/>
+            <a:ext cx="4447160" cy="5606141"/>
           </a:xfrm>
         </p:spPr>
         <p:txBody>
-          <a:bodyPr>
-            <a:noAutofit/>
-          </a:bodyPr>
+          <a:bodyPr/>
           <a:lstStyle/>
           <a:p>
             <a:r>
-              <a:rPr lang="en-US" sz="2400" dirty="0"/>
-              <a:t>Developed </a:t>
-            </a:r>
-            <a:r>
-              <a:rPr lang="en-US" sz="2400" dirty="0" err="1"/>
-              <a:t>PyTest</a:t>
-            </a:r>
-            <a:r>
-              <a:rPr lang="en-US" sz="2400" dirty="0"/>
-              <a:t> unit tests to validate the Bronze, Silver, and Gold layer tables.</a:t>
-            </a:r>
-          </a:p>
-          <a:p>
-            <a:r>
-              <a:rPr lang="en-US" sz="2400" dirty="0"/>
-              <a:t> Verified that all required tables are created successfully in the pipeline.</a:t>
-            </a:r>
-          </a:p>
-          <a:p>
-            <a:r>
-              <a:rPr lang="en-US" sz="2400" dirty="0"/>
-              <a:t> Checked that data is properly loaded and row counts are greater than zero.</a:t>
-            </a:r>
-          </a:p>
-          <a:p>
-            <a:r>
-              <a:rPr lang="en-US" sz="2400" dirty="0"/>
-              <a:t>Ensured schema validation and correct column names across all tables.</a:t>
-            </a:r>
-          </a:p>
-          <a:p>
-            <a:r>
-              <a:rPr lang="en-US" sz="2400" dirty="0"/>
-              <a:t>Performed data quality checks such as duplicate detection and invalid value filtering.</a:t>
-            </a:r>
-          </a:p>
-        </p:txBody>
-      </p:sp>
+              <a:rPr lang="en-US" sz="1600" dirty="0"/>
+              <a:t>Integrated </a:t>
+            </a:r>
+            <a:r>
+              <a:rPr lang="en-US" sz="1600" dirty="0" err="1"/>
+              <a:t>dbt</a:t>
+            </a:r>
+            <a:r>
+              <a:rPr lang="en-US" sz="1600" dirty="0"/>
+              <a:t> in the Gold layer to perform advanced transformations on IoT sensor data.</a:t>
+            </a:r>
+          </a:p>
+          <a:p>
+            <a:r>
+              <a:rPr lang="en-US" sz="1600" dirty="0"/>
+              <a:t>Used existing fact and dimension tables (</a:t>
+            </a:r>
+            <a:r>
+              <a:rPr lang="en-US" sz="1600" dirty="0" err="1"/>
+              <a:t>fact_device_monitoring</a:t>
+            </a:r>
+            <a:r>
+              <a:rPr lang="en-US" sz="1600" dirty="0"/>
+              <a:t>, </a:t>
+            </a:r>
+            <a:r>
+              <a:rPr lang="en-US" sz="1600" dirty="0" err="1"/>
+              <a:t>dim_sensor</a:t>
+            </a:r>
+            <a:r>
+              <a:rPr lang="en-US" sz="1600" dirty="0"/>
+              <a:t>, </a:t>
+            </a:r>
+            <a:r>
+              <a:rPr lang="en-US" sz="1600" dirty="0" err="1"/>
+              <a:t>dim_location</a:t>
+            </a:r>
+            <a:r>
+              <a:rPr lang="en-US" sz="1600" dirty="0"/>
+              <a:t>, </a:t>
+            </a:r>
+            <a:r>
+              <a:rPr lang="en-US" sz="1600" dirty="0" err="1"/>
+              <a:t>dim_time</a:t>
+            </a:r>
+            <a:r>
+              <a:rPr lang="en-US" sz="1600" dirty="0"/>
+              <a:t>) as input sources.</a:t>
+            </a:r>
+          </a:p>
+          <a:p>
+            <a:r>
+              <a:rPr lang="en-US" sz="1600" dirty="0"/>
+              <a:t>Built </a:t>
+            </a:r>
+            <a:r>
+              <a:rPr lang="en-US" sz="1600" dirty="0" err="1"/>
+              <a:t>dbt</a:t>
+            </a:r>
+            <a:r>
+              <a:rPr lang="en-US" sz="1600" dirty="0"/>
+              <a:t> models to generate insights like device health analysis, anomaly detection, downtime analysis, and critical device monitoring.</a:t>
+            </a:r>
+          </a:p>
+          <a:p>
+            <a:r>
+              <a:rPr lang="en-US" sz="1600" dirty="0"/>
+              <a:t>Created modular SQL models to improve scalability, reusability, and maintainability of the pipeline.</a:t>
+            </a:r>
+          </a:p>
+          <a:p>
+            <a:r>
+              <a:rPr lang="en-US" sz="1600" dirty="0"/>
+              <a:t>Applied data quality tests (like not null, unique) using </a:t>
+            </a:r>
+            <a:r>
+              <a:rPr lang="en-US" sz="1600" dirty="0" err="1"/>
+              <a:t>dbt</a:t>
+            </a:r>
+            <a:r>
+              <a:rPr lang="en-US" sz="1600" dirty="0"/>
+              <a:t> to ensure accurate and reliable data.</a:t>
+            </a:r>
+          </a:p>
+          <a:p>
+            <a:r>
+              <a:rPr lang="en-US" sz="1600" dirty="0"/>
+              <a:t>Materialized </a:t>
+            </a:r>
+            <a:r>
+              <a:rPr lang="en-US" sz="1600" dirty="0" err="1"/>
+              <a:t>dbt</a:t>
+            </a:r>
+            <a:r>
+              <a:rPr lang="en-US" sz="1600" dirty="0"/>
+              <a:t> models as tables in Databricks Delta Lake, which are used for dashboards and monitoring.</a:t>
+            </a:r>
+          </a:p>
+          <a:p>
+            <a:endParaRPr lang="en-IN" dirty="0"/>
+          </a:p>
+        </p:txBody>
+      </p:sp>
+      <p:pic>
+        <p:nvPicPr>
+          <p:cNvPr id="10" name="Picture 9">
+            <a:extLst>
+              <a:ext uri="{FF2B5EF4-FFF2-40B4-BE49-F238E27FC236}">
+                <a16:creationId xmlns:a16="http://schemas.microsoft.com/office/drawing/2014/main" id="{0E34E7F7-8A61-E7E9-1700-A669602E77E6}"/>
+              </a:ext>
+            </a:extLst>
+          </p:cNvPr>
+          <p:cNvPicPr>
+            <a:picLocks noChangeAspect="1"/>
+          </p:cNvPicPr>
+          <p:nvPr/>
+        </p:nvPicPr>
+        <p:blipFill>
+          <a:blip r:embed="rId3">
+            <a:extLst>
+              <a:ext uri="{28A0092B-C50C-407E-A947-70E740481C1C}">
+                <a14:useLocalDpi xmlns:a14="http://schemas.microsoft.com/office/drawing/2010/main" val="0"/>
+              </a:ext>
+            </a:extLst>
+          </a:blip>
+          <a:stretch>
+            <a:fillRect/>
+          </a:stretch>
+        </p:blipFill>
+        <p:spPr>
+          <a:xfrm>
+            <a:off x="4206138" y="1419214"/>
+            <a:ext cx="3729548" cy="3826662"/>
+          </a:xfrm>
+          <a:prstGeom prst="rect">
+            <a:avLst/>
+          </a:prstGeom>
+        </p:spPr>
+      </p:pic>
     </p:spTree>
     <p:extLst>
       <p:ext uri="{BB962C8B-B14F-4D97-AF65-F5344CB8AC3E}">
-        <p14:creationId xmlns:p14="http://schemas.microsoft.com/office/powerpoint/2010/main" val="3043391216"/>
+        <p14:creationId xmlns:p14="http://schemas.microsoft.com/office/powerpoint/2010/main" val="2912946641"/>
       </p:ext>
     </p:extLst>
   </p:cSld>
@@ -7307,6 +7311,134 @@
           <p:cNvPr id="2" name="Title 1">
             <a:extLst>
               <a:ext uri="{FF2B5EF4-FFF2-40B4-BE49-F238E27FC236}">
+                <a16:creationId xmlns:a16="http://schemas.microsoft.com/office/drawing/2014/main" id="{B8E31C44-94DB-0422-7744-376B46A1AD71}"/>
+              </a:ext>
+            </a:extLst>
+          </p:cNvPr>
+          <p:cNvSpPr>
+            <a:spLocks noGrp="1"/>
+          </p:cNvSpPr>
+          <p:nvPr>
+            <p:ph type="title"/>
+          </p:nvPr>
+        </p:nvSpPr>
+        <p:spPr/>
+        <p:txBody>
+          <a:bodyPr/>
+          <a:lstStyle/>
+          <a:p>
+            <a:r>
+              <a:rPr lang="en-US" dirty="0"/>
+              <a:t>                      Testing</a:t>
+            </a:r>
+          </a:p>
+        </p:txBody>
+      </p:sp>
+      <p:sp>
+        <p:nvSpPr>
+          <p:cNvPr id="3" name="Content Placeholder 2">
+            <a:extLst>
+              <a:ext uri="{FF2B5EF4-FFF2-40B4-BE49-F238E27FC236}">
+                <a16:creationId xmlns:a16="http://schemas.microsoft.com/office/drawing/2014/main" id="{E01DA643-2CB2-46E6-7ED6-6DD18D52A287}"/>
+              </a:ext>
+            </a:extLst>
+          </p:cNvPr>
+          <p:cNvSpPr>
+            <a:spLocks noGrp="1"/>
+          </p:cNvSpPr>
+          <p:nvPr>
+            <p:ph idx="1"/>
+          </p:nvPr>
+        </p:nvSpPr>
+        <p:spPr>
+          <a:xfrm>
+            <a:off x="1103312" y="2052918"/>
+            <a:ext cx="10065431" cy="4195481"/>
+          </a:xfrm>
+        </p:spPr>
+        <p:txBody>
+          <a:bodyPr>
+            <a:noAutofit/>
+          </a:bodyPr>
+          <a:lstStyle/>
+          <a:p>
+            <a:r>
+              <a:rPr lang="en-US" sz="2400" dirty="0"/>
+              <a:t>Developed </a:t>
+            </a:r>
+            <a:r>
+              <a:rPr lang="en-US" sz="2400" dirty="0" err="1"/>
+              <a:t>PyTest</a:t>
+            </a:r>
+            <a:r>
+              <a:rPr lang="en-US" sz="2400" dirty="0"/>
+              <a:t> unit tests to validate the Bronze, Silver, and Gold layer tables.</a:t>
+            </a:r>
+          </a:p>
+          <a:p>
+            <a:r>
+              <a:rPr lang="en-US" sz="2400" dirty="0"/>
+              <a:t> Verified that all required tables are created successfully in the pipeline.</a:t>
+            </a:r>
+          </a:p>
+          <a:p>
+            <a:r>
+              <a:rPr lang="en-US" sz="2400" dirty="0"/>
+              <a:t> Checked that data is properly loaded and row counts are greater than zero.</a:t>
+            </a:r>
+          </a:p>
+          <a:p>
+            <a:r>
+              <a:rPr lang="en-US" sz="2400" dirty="0"/>
+              <a:t>Ensured schema validation and correct column names across all tables.</a:t>
+            </a:r>
+          </a:p>
+          <a:p>
+            <a:r>
+              <a:rPr lang="en-US" sz="2400" dirty="0"/>
+              <a:t>Performed data quality checks such as duplicate detection and invalid value filtering.</a:t>
+            </a:r>
+          </a:p>
+        </p:txBody>
+      </p:sp>
+    </p:spTree>
+    <p:extLst>
+      <p:ext uri="{BB962C8B-B14F-4D97-AF65-F5344CB8AC3E}">
+        <p14:creationId xmlns:p14="http://schemas.microsoft.com/office/powerpoint/2010/main" val="3043391216"/>
+      </p:ext>
+    </p:extLst>
+  </p:cSld>
+  <p:clrMapOvr>
+    <a:masterClrMapping/>
+  </p:clrMapOvr>
+  <p:transition spd="med">
+    <p:pull/>
+  </p:transition>
+</p:sld>
+</file>
+
+<file path=ppt/slides/slide16.xml><?xml version="1.0" encoding="utf-8"?>
+<p:sld xmlns:a="http://schemas.openxmlformats.org/drawingml/2006/main" xmlns:r="http://schemas.openxmlformats.org/officeDocument/2006/relationships" xmlns:p="http://schemas.openxmlformats.org/presentationml/2006/main">
+  <p:cSld>
+    <p:spTree>
+      <p:nvGrpSpPr>
+        <p:cNvPr id="1" name=""/>
+        <p:cNvGrpSpPr/>
+        <p:nvPr/>
+      </p:nvGrpSpPr>
+      <p:grpSpPr>
+        <a:xfrm>
+          <a:off x="0" y="0"/>
+          <a:ext cx="0" cy="0"/>
+          <a:chOff x="0" y="0"/>
+          <a:chExt cx="0" cy="0"/>
+        </a:xfrm>
+      </p:grpSpPr>
+      <p:sp>
+        <p:nvSpPr>
+          <p:cNvPr id="2" name="Title 1">
+            <a:extLst>
+              <a:ext uri="{FF2B5EF4-FFF2-40B4-BE49-F238E27FC236}">
                 <a16:creationId xmlns:a16="http://schemas.microsoft.com/office/drawing/2014/main" id="{1692DAC3-686C-C5A9-EB94-7315ADF45855}"/>
               </a:ext>
             </a:extLst>
@@ -7417,7 +7549,7 @@
 </p:sld>
 </file>
 
-<file path=ppt/slides/slide16.xml><?xml version="1.0" encoding="utf-8"?>
+<file path=ppt/slides/slide17.xml><?xml version="1.0" encoding="utf-8"?>
 <p:sld xmlns:a="http://schemas.openxmlformats.org/drawingml/2006/main" xmlns:r="http://schemas.openxmlformats.org/officeDocument/2006/relationships" xmlns:p="http://schemas.openxmlformats.org/presentationml/2006/main">
   <p:cSld>
     <p:spTree>
